--- a/deck/Core_Mexico_Business_Case.pptx
+++ b/deck/Core_Mexico_Business_Case.pptx
@@ -7362,7 +7362,7 @@
                 <a:ea typeface="Calibri" pitchFamily="34" charset="-122"/>
                 <a:cs typeface="Calibri" pitchFamily="34" charset="-120"/>
               </a:rPr>
-              <a:t>β constant. It is not: it rises once a licensed competitor advertises against us</a:t>
+              <a:t>Balance sensitivity constant. It is not — it rises once a licensed competitor advertises against us</a:t>
             </a:r>
             <a:endParaRPr lang="en-US" sz="1200" dirty="0"/>
           </a:p>
@@ -7474,7 +7474,7 @@
                 <a:ea typeface="Calibri" pitchFamily="34" charset="-122"/>
                 <a:cs typeface="Calibri" pitchFamily="34" charset="-120"/>
               </a:rPr>
-              <a:t>Is β blended, or do you have it by segment?</a:t>
+              <a:t>Is balance sensitivity blended, or do you have it by segment?</a:t>
             </a:r>
             <a:endParaRPr lang="en-US" sz="1200" dirty="0"/>
           </a:p>
@@ -13115,7 +13115,7 @@
                 <a:ea typeface="Calibri" pitchFamily="34" charset="-122"/>
                 <a:cs typeface="Calibri" pitchFamily="34" charset="-120"/>
               </a:rPr>
-              <a:t>Instrument β by segment via a geographic holdout</a:t>
+              <a:t>Instrument balance sensitivity by segment, via a geographic holdout</a:t>
             </a:r>
             <a:endParaRPr lang="en-US" sz="1200" dirty="0"/>
           </a:p>
@@ -14204,7 +14204,7 @@
                 <a:ea typeface="Arial" pitchFamily="34" charset="-122"/>
                 <a:cs typeface="Arial" pitchFamily="34" charset="-120"/>
               </a:rPr>
-              <a:t>Segment β. Never blend it.</a:t>
+              <a:t>Segment balance sensitivity. Never blend it.</a:t>
             </a:r>
             <a:endParaRPr lang="en-US" sz="1350" dirty="0"/>
           </a:p>
@@ -14246,7 +14246,7 @@
                 <a:ea typeface="Calibri" pitchFamily="34" charset="-122"/>
                 <a:cs typeface="Calibri" pitchFamily="34" charset="-120"/>
               </a:rPr>
-              <a:t>The base is two populations: brand-acquired at β near zero, and rate-shoppers. A blended β makes every cut look safe until it suddenly is not.</a:t>
+              <a:t>Balances that leave per point of rate cut — not the pass-through “deposit beta”. The base is two populations: brand-acquired and near-insensitive, and rate-shoppers. Blending them makes every cut look safe until it is not.</a:t>
             </a:r>
             <a:endParaRPr lang="en-US" sz="1150" dirty="0"/>
           </a:p>
@@ -14504,7 +14504,7 @@
                 <a:ea typeface="Calibri" pitchFamily="34" charset="-122"/>
                 <a:cs typeface="Calibri" pitchFamily="34" charset="-120"/>
               </a:rPr>
-              <a:t>β by segment, from a geographic rate holdout — not a blended number</a:t>
+              <a:t>Balance sensitivity by segment, from a geographic rate holdout — not a blended number</a:t>
             </a:r>
             <a:endParaRPr lang="en-US" sz="1150" dirty="0"/>
           </a:p>
@@ -15386,7 +15386,7 @@
                 <a:ea typeface="Calibri" pitchFamily="34" charset="-122"/>
                 <a:cs typeface="Calibri" pitchFamily="34" charset="-120"/>
               </a:rPr>
-              <a:t>“Move any slider. The one I would move first is β — push it to 6 and the rate-cut story stops working. That asymmetry is the argument: a rate cut is a one-time harvest with rising risk. Income visibility compounds.”</a:t>
+              <a:t>“Move any slider. The one I would move first is balance sensitivity — push it to 6 and the rate-cut story stops working. That asymmetry is the argument: a rate cut is a one-time harvest with rising risk. Income visibility compounds.”</a:t>
             </a:r>
             <a:endParaRPr lang="en-US" sz="1200" dirty="0"/>
           </a:p>

--- a/deck/Core_Mexico_Business_Case.pptx
+++ b/deck/Core_Mexico_Business_Case.pptx
@@ -1859,7 +1859,7 @@
           <a:p>
             <a:r>
               <a:rPr lang="en-US" dirty="0"/>
-              <a:t/>
+              <a:t>Critical: do NOT propose tiering, capping or behavioural gating as new ideas. Diego owned this product and all three already exist. The contribution is which gate and which cap.</a:t>
             </a:r>
             <a:endParaRPr lang="en-US" dirty="0"/>
           </a:p>
@@ -10880,9 +10880,48 @@
                 <a:ea typeface="Arial" pitchFamily="34" charset="-122"/>
                 <a:cs typeface="Arial" pitchFamily="34" charset="-120"/>
               </a:rPr>
-              <a:t>Two tiers, earned by behaviour — not by balance</a:t>
+              <a:t>The tiering already exists. Three things I would change.</a:t>
             </a:r>
             <a:endParaRPr lang="en-US" sz="3100" dirty="0"/>
+          </a:p>
+        </p:txBody>
+      </p:sp>
+      <p:sp>
+        <p:nvSpPr>
+          <p:cNvPr id="5" name="Text 3"/>
+          <p:cNvSpPr txBox="1"/>
+          <p:nvPr/>
+        </p:nvSpPr>
+        <p:spPr>
+          <a:xfrm>
+            <a:off x="566928" y="1737360"/>
+            <a:ext cx="5760720" cy="274320"/>
+          </a:xfrm>
+          <a:prstGeom prst="rect">
+            <a:avLst/>
+          </a:prstGeom>
+          <a:noFill/>
+          <a:ln/>
+        </p:spPr>
+        <p:txBody>
+          <a:bodyPr wrap="square" lIns="0" tIns="0" rIns="0" bIns="0" rtlCol="0" anchor="ctr"/>
+          <a:lstStyle/>
+          <a:p>
+            <a:pPr indent="0" marL="0">
+              <a:buNone/>
+            </a:pPr>
+            <a:r>
+              <a:rPr lang="en-US" sz="1200" i="1" dirty="0">
+                <a:solidFill>
+                  <a:srgbClr val="6E6484"/>
+                </a:solidFill>
+                <a:latin typeface="Calibri" pitchFamily="34" charset="0"/>
+                <a:ea typeface="Calibri" pitchFamily="34" charset="-122"/>
+                <a:cs typeface="Calibri" pitchFamily="34" charset="-120"/>
+              </a:rPr>
+              <a:t>Published rate card, in force 10 August to 7 October 2026</a:t>
+            </a:r>
+            <a:endParaRPr lang="en-US" sz="1200" dirty="0"/>
           </a:p>
         </p:txBody>
       </p:sp>
@@ -10901,19 +10940,19 @@
           </p:nvPr>
         </p:nvGraphicFramePr>
         <p:xfrm>
-          <a:off x="566928" y="1783080"/>
-          <a:ext cx="6492240" cy="914400"/>
+          <a:off x="566928" y="2084832"/>
+          <a:ext cx="5760720" cy="914400"/>
         </p:xfrm>
         <a:graphic>
           <a:graphicData uri="http://schemas.openxmlformats.org/drawingml/2006/table">
             <a:tbl>
               <a:tblPr/>
               <a:tblGrid>
-                <a:gridCol w="1737360"/>
-                <a:gridCol w="1920240"/>
-                <a:gridCol w="2834640"/>
+                <a:gridCol w="1600200"/>
+                <a:gridCol w="1051560"/>
+                <a:gridCol w="3108960"/>
               </a:tblGrid>
-              <a:tr h="402336">
+              <a:tr h="420624">
                 <a:tc>
                   <a:txBody>
                     <a:bodyPr/>
@@ -10922,6 +10961,223 @@
                       <a:pPr indent="0" marL="0">
                         <a:buNone/>
                       </a:pPr>
+                      <a:r>
+                        <a:rPr lang="en-US" sz="1050" b="1" dirty="0">
+                          <a:solidFill>
+                            <a:srgbClr val="6E6484"/>
+                          </a:solidFill>
+                          <a:latin typeface="Calibri" pitchFamily="34" charset="0"/>
+                          <a:ea typeface="Calibri" pitchFamily="34" charset="-122"/>
+                          <a:cs typeface="Calibri" pitchFamily="34" charset="-120"/>
+                        </a:rPr>
+                        <a:t>Product</a:t>
+                      </a:r>
+                      <a:endParaRPr lang="en-US" sz="1050" dirty="0">
+                        <a:latin typeface="Calibri" charset="0"/>
+                        <a:ea typeface="Calibri" charset="0"/>
+                        <a:cs typeface="Calibri" charset="0"/>
+                      </a:endParaRPr>
+                    </a:p>
+                  </a:txBody>
+                  <a:tcPr marL="82296" marR="82296" marT="82296" marB="82296" anchor="ctr">
+                    <a:lnL w="12700" cap="flat" cmpd="sng" algn="ctr">
+                      <a:solidFill>
+                        <a:srgbClr val="E2DCEC"/>
+                      </a:solidFill>
+                      <a:prstDash val="solid"/>
+                      <a:round/>
+                      <a:headEnd type="none" w="med" len="med"/>
+                      <a:tailEnd type="none" w="med" len="med"/>
+                    </a:lnL>
+                    <a:lnR w="12700" cap="flat" cmpd="sng" algn="ctr">
+                      <a:solidFill>
+                        <a:srgbClr val="E2DCEC"/>
+                      </a:solidFill>
+                      <a:prstDash val="solid"/>
+                      <a:round/>
+                      <a:headEnd type="none" w="med" len="med"/>
+                      <a:tailEnd type="none" w="med" len="med"/>
+                    </a:lnR>
+                    <a:lnT w="12700" cap="flat" cmpd="sng" algn="ctr">
+                      <a:solidFill>
+                        <a:srgbClr val="E2DCEC"/>
+                      </a:solidFill>
+                      <a:prstDash val="solid"/>
+                      <a:round/>
+                      <a:headEnd type="none" w="med" len="med"/>
+                      <a:tailEnd type="none" w="med" len="med"/>
+                    </a:lnT>
+                    <a:lnB w="12700" cap="flat" cmpd="sng" algn="ctr">
+                      <a:solidFill>
+                        <a:srgbClr val="E2DCEC"/>
+                      </a:solidFill>
+                      <a:prstDash val="solid"/>
+                      <a:round/>
+                      <a:headEnd type="none" w="med" len="med"/>
+                      <a:tailEnd type="none" w="med" len="med"/>
+                    </a:lnB>
+                    <a:solidFill>
+                      <a:srgbClr val="FFFFFF"/>
+                    </a:solidFill>
+                  </a:tcPr>
+                </a:tc>
+                <a:tc>
+                  <a:txBody>
+                    <a:bodyPr/>
+                    <a:lstStyle/>
+                    <a:p>
+                      <a:pPr indent="0" marL="0">
+                        <a:buNone/>
+                      </a:pPr>
+                      <a:r>
+                        <a:rPr lang="en-US" sz="1050" b="1" dirty="0">
+                          <a:solidFill>
+                            <a:srgbClr val="6E6484"/>
+                          </a:solidFill>
+                          <a:latin typeface="Calibri" pitchFamily="34" charset="0"/>
+                          <a:ea typeface="Calibri" pitchFamily="34" charset="-122"/>
+                          <a:cs typeface="Calibri" pitchFamily="34" charset="-120"/>
+                        </a:rPr>
+                        <a:t>Rate</a:t>
+                      </a:r>
+                      <a:endParaRPr lang="en-US" sz="1050" dirty="0">
+                        <a:latin typeface="Calibri" charset="0"/>
+                        <a:ea typeface="Calibri" charset="0"/>
+                        <a:cs typeface="Calibri" charset="0"/>
+                      </a:endParaRPr>
+                    </a:p>
+                  </a:txBody>
+                  <a:tcPr marL="82296" marR="82296" marT="82296" marB="82296" anchor="ctr">
+                    <a:lnL w="12700" cap="flat" cmpd="sng" algn="ctr">
+                      <a:solidFill>
+                        <a:srgbClr val="E2DCEC"/>
+                      </a:solidFill>
+                      <a:prstDash val="solid"/>
+                      <a:round/>
+                      <a:headEnd type="none" w="med" len="med"/>
+                      <a:tailEnd type="none" w="med" len="med"/>
+                    </a:lnL>
+                    <a:lnR w="12700" cap="flat" cmpd="sng" algn="ctr">
+                      <a:solidFill>
+                        <a:srgbClr val="E2DCEC"/>
+                      </a:solidFill>
+                      <a:prstDash val="solid"/>
+                      <a:round/>
+                      <a:headEnd type="none" w="med" len="med"/>
+                      <a:tailEnd type="none" w="med" len="med"/>
+                    </a:lnR>
+                    <a:lnT w="12700" cap="flat" cmpd="sng" algn="ctr">
+                      <a:solidFill>
+                        <a:srgbClr val="E2DCEC"/>
+                      </a:solidFill>
+                      <a:prstDash val="solid"/>
+                      <a:round/>
+                      <a:headEnd type="none" w="med" len="med"/>
+                      <a:tailEnd type="none" w="med" len="med"/>
+                    </a:lnT>
+                    <a:lnB w="12700" cap="flat" cmpd="sng" algn="ctr">
+                      <a:solidFill>
+                        <a:srgbClr val="E2DCEC"/>
+                      </a:solidFill>
+                      <a:prstDash val="solid"/>
+                      <a:round/>
+                      <a:headEnd type="none" w="med" len="med"/>
+                      <a:tailEnd type="none" w="med" len="med"/>
+                    </a:lnB>
+                    <a:solidFill>
+                      <a:srgbClr val="FFFFFF"/>
+                    </a:solidFill>
+                  </a:tcPr>
+                </a:tc>
+                <a:tc>
+                  <a:txBody>
+                    <a:bodyPr/>
+                    <a:lstStyle/>
+                    <a:p>
+                      <a:pPr indent="0" marL="0">
+                        <a:buNone/>
+                      </a:pPr>
+                      <a:r>
+                        <a:rPr lang="en-US" sz="1050" b="1" dirty="0">
+                          <a:solidFill>
+                            <a:srgbClr val="6E6484"/>
+                          </a:solidFill>
+                          <a:latin typeface="Calibri" pitchFamily="34" charset="0"/>
+                          <a:ea typeface="Calibri" pitchFamily="34" charset="-122"/>
+                          <a:cs typeface="Calibri" pitchFamily="34" charset="-120"/>
+                        </a:rPr>
+                        <a:t>Condition</a:t>
+                      </a:r>
+                      <a:endParaRPr lang="en-US" sz="1050" dirty="0">
+                        <a:latin typeface="Calibri" charset="0"/>
+                        <a:ea typeface="Calibri" charset="0"/>
+                        <a:cs typeface="Calibri" charset="0"/>
+                      </a:endParaRPr>
+                    </a:p>
+                  </a:txBody>
+                  <a:tcPr marL="82296" marR="82296" marT="82296" marB="82296" anchor="ctr">
+                    <a:lnL w="12700" cap="flat" cmpd="sng" algn="ctr">
+                      <a:solidFill>
+                        <a:srgbClr val="E2DCEC"/>
+                      </a:solidFill>
+                      <a:prstDash val="solid"/>
+                      <a:round/>
+                      <a:headEnd type="none" w="med" len="med"/>
+                      <a:tailEnd type="none" w="med" len="med"/>
+                    </a:lnL>
+                    <a:lnR w="12700" cap="flat" cmpd="sng" algn="ctr">
+                      <a:solidFill>
+                        <a:srgbClr val="E2DCEC"/>
+                      </a:solidFill>
+                      <a:prstDash val="solid"/>
+                      <a:round/>
+                      <a:headEnd type="none" w="med" len="med"/>
+                      <a:tailEnd type="none" w="med" len="med"/>
+                    </a:lnR>
+                    <a:lnT w="12700" cap="flat" cmpd="sng" algn="ctr">
+                      <a:solidFill>
+                        <a:srgbClr val="E2DCEC"/>
+                      </a:solidFill>
+                      <a:prstDash val="solid"/>
+                      <a:round/>
+                      <a:headEnd type="none" w="med" len="med"/>
+                      <a:tailEnd type="none" w="med" len="med"/>
+                    </a:lnT>
+                    <a:lnB w="12700" cap="flat" cmpd="sng" algn="ctr">
+                      <a:solidFill>
+                        <a:srgbClr val="E2DCEC"/>
+                      </a:solidFill>
+                      <a:prstDash val="solid"/>
+                      <a:round/>
+                      <a:headEnd type="none" w="med" len="med"/>
+                      <a:tailEnd type="none" w="med" len="med"/>
+                    </a:lnB>
+                    <a:solidFill>
+                      <a:srgbClr val="FFFFFF"/>
+                    </a:solidFill>
+                  </a:tcPr>
+                </a:tc>
+              </a:tr>
+              <a:tr h="420624">
+                <a:tc>
+                  <a:txBody>
+                    <a:bodyPr/>
+                    <a:lstStyle/>
+                    <a:p>
+                      <a:pPr indent="0" marL="0">
+                        <a:buNone/>
+                      </a:pPr>
+                      <a:r>
+                        <a:rPr lang="en-US" sz="1200" b="1" dirty="0">
+                          <a:solidFill>
+                            <a:srgbClr val="19102A"/>
+                          </a:solidFill>
+                          <a:latin typeface="Calibri" pitchFamily="34" charset="0"/>
+                          <a:ea typeface="Calibri" pitchFamily="34" charset="-122"/>
+                          <a:cs typeface="Calibri" pitchFamily="34" charset="-120"/>
+                        </a:rPr>
+                        <a:t>Cajita 24/7</a:t>
+                      </a:r>
                       <a:endParaRPr lang="en-US" sz="1200" dirty="0">
                         <a:latin typeface="Calibri" charset="0"/>
                         <a:ea typeface="Calibri" charset="0"/>
@@ -10980,155 +11236,17 @@
                         <a:buNone/>
                       </a:pPr>
                       <a:r>
-                        <a:rPr lang="en-US" sz="1500" b="1" dirty="0">
+                        <a:rPr lang="en-US" sz="1200" b="1" dirty="0">
                           <a:solidFill>
                             <a:srgbClr val="19102A"/>
-                          </a:solidFill>
-                          <a:latin typeface="Arial" pitchFamily="34" charset="0"/>
-                          <a:ea typeface="Arial" pitchFamily="34" charset="-122"/>
-                          <a:cs typeface="Arial" pitchFamily="34" charset="-120"/>
-                        </a:rPr>
-                        <a:t>Nu Base</a:t>
-                      </a:r>
-                      <a:endParaRPr lang="en-US" sz="1500" dirty="0">
-                        <a:latin typeface="Arial" charset="0"/>
-                        <a:ea typeface="Arial" charset="0"/>
-                        <a:cs typeface="Arial" charset="0"/>
-                      </a:endParaRPr>
-                    </a:p>
-                  </a:txBody>
-                  <a:tcPr marL="82296" marR="82296" marT="82296" marB="82296" anchor="ctr">
-                    <a:lnL w="12700" cap="flat" cmpd="sng" algn="ctr">
-                      <a:solidFill>
-                        <a:srgbClr val="E2DCEC"/>
-                      </a:solidFill>
-                      <a:prstDash val="solid"/>
-                      <a:round/>
-                      <a:headEnd type="none" w="med" len="med"/>
-                      <a:tailEnd type="none" w="med" len="med"/>
-                    </a:lnL>
-                    <a:lnR w="12700" cap="flat" cmpd="sng" algn="ctr">
-                      <a:solidFill>
-                        <a:srgbClr val="E2DCEC"/>
-                      </a:solidFill>
-                      <a:prstDash val="solid"/>
-                      <a:round/>
-                      <a:headEnd type="none" w="med" len="med"/>
-                      <a:tailEnd type="none" w="med" len="med"/>
-                    </a:lnR>
-                    <a:lnT w="12700" cap="flat" cmpd="sng" algn="ctr">
-                      <a:solidFill>
-                        <a:srgbClr val="E2DCEC"/>
-                      </a:solidFill>
-                      <a:prstDash val="solid"/>
-                      <a:round/>
-                      <a:headEnd type="none" w="med" len="med"/>
-                      <a:tailEnd type="none" w="med" len="med"/>
-                    </a:lnT>
-                    <a:lnB w="12700" cap="flat" cmpd="sng" algn="ctr">
-                      <a:solidFill>
-                        <a:srgbClr val="E2DCEC"/>
-                      </a:solidFill>
-                      <a:prstDash val="solid"/>
-                      <a:round/>
-                      <a:headEnd type="none" w="med" len="med"/>
-                      <a:tailEnd type="none" w="med" len="med"/>
-                    </a:lnB>
-                    <a:solidFill>
-                      <a:srgbClr val="FFFFFF"/>
-                    </a:solidFill>
-                  </a:tcPr>
-                </a:tc>
-                <a:tc>
-                  <a:txBody>
-                    <a:bodyPr/>
-                    <a:lstStyle/>
-                    <a:p>
-                      <a:pPr indent="0" marL="0">
-                        <a:buNone/>
-                      </a:pPr>
-                      <a:r>
-                        <a:rPr lang="en-US" sz="1500" b="1" dirty="0">
-                          <a:solidFill>
-                            <a:srgbClr val="820AD1"/>
-                          </a:solidFill>
-                          <a:latin typeface="Arial" pitchFamily="34" charset="0"/>
-                          <a:ea typeface="Arial" pitchFamily="34" charset="-122"/>
-                          <a:cs typeface="Arial" pitchFamily="34" charset="-120"/>
-                        </a:rPr>
-                        <a:t>Nu Nómina</a:t>
-                      </a:r>
-                      <a:endParaRPr lang="en-US" sz="1500" dirty="0">
-                        <a:latin typeface="Arial" charset="0"/>
-                        <a:ea typeface="Arial" charset="0"/>
-                        <a:cs typeface="Arial" charset="0"/>
-                      </a:endParaRPr>
-                    </a:p>
-                  </a:txBody>
-                  <a:tcPr marL="82296" marR="82296" marT="82296" marB="82296" anchor="ctr">
-                    <a:lnL w="12700" cap="flat" cmpd="sng" algn="ctr">
-                      <a:solidFill>
-                        <a:srgbClr val="E2DCEC"/>
-                      </a:solidFill>
-                      <a:prstDash val="solid"/>
-                      <a:round/>
-                      <a:headEnd type="none" w="med" len="med"/>
-                      <a:tailEnd type="none" w="med" len="med"/>
-                    </a:lnL>
-                    <a:lnR w="12700" cap="flat" cmpd="sng" algn="ctr">
-                      <a:solidFill>
-                        <a:srgbClr val="E2DCEC"/>
-                      </a:solidFill>
-                      <a:prstDash val="solid"/>
-                      <a:round/>
-                      <a:headEnd type="none" w="med" len="med"/>
-                      <a:tailEnd type="none" w="med" len="med"/>
-                    </a:lnR>
-                    <a:lnT w="12700" cap="flat" cmpd="sng" algn="ctr">
-                      <a:solidFill>
-                        <a:srgbClr val="E2DCEC"/>
-                      </a:solidFill>
-                      <a:prstDash val="solid"/>
-                      <a:round/>
-                      <a:headEnd type="none" w="med" len="med"/>
-                      <a:tailEnd type="none" w="med" len="med"/>
-                    </a:lnT>
-                    <a:lnB w="12700" cap="flat" cmpd="sng" algn="ctr">
-                      <a:solidFill>
-                        <a:srgbClr val="E2DCEC"/>
-                      </a:solidFill>
-                      <a:prstDash val="solid"/>
-                      <a:round/>
-                      <a:headEnd type="none" w="med" len="med"/>
-                      <a:tailEnd type="none" w="med" len="med"/>
-                    </a:lnB>
-                    <a:solidFill>
-                      <a:srgbClr val="FFFFFF"/>
-                    </a:solidFill>
-                  </a:tcPr>
-                </a:tc>
-              </a:tr>
-              <a:tr h="402336">
-                <a:tc>
-                  <a:txBody>
-                    <a:bodyPr/>
-                    <a:lstStyle/>
-                    <a:p>
-                      <a:pPr indent="0" marL="0">
-                        <a:buNone/>
-                      </a:pPr>
-                      <a:r>
-                        <a:rPr lang="en-US" sz="1150" b="1" dirty="0">
-                          <a:solidFill>
-                            <a:srgbClr val="6E6484"/>
                           </a:solidFill>
                           <a:latin typeface="Calibri" pitchFamily="34" charset="0"/>
                           <a:ea typeface="Calibri" pitchFamily="34" charset="-122"/>
                           <a:cs typeface="Calibri" pitchFamily="34" charset="-120"/>
                         </a:rPr>
-                        <a:t>How you qualify</a:t>
+                        <a:t>6.50%</a:t>
                       </a:r>
-                      <a:endParaRPr lang="en-US" sz="1150" dirty="0">
+                      <a:endParaRPr lang="en-US" sz="1200" dirty="0">
                         <a:latin typeface="Calibri" charset="0"/>
                         <a:ea typeface="Calibri" charset="0"/>
                         <a:cs typeface="Calibri" charset="0"/>
@@ -11186,7 +11304,7 @@
                         <a:buNone/>
                       </a:pPr>
                       <a:r>
-                        <a:rPr lang="en-US" sz="1250" dirty="0">
+                        <a:rPr lang="en-US" sz="1100" dirty="0">
                           <a:solidFill>
                             <a:srgbClr val="2F2740"/>
                           </a:solidFill>
@@ -11194,9 +11312,79 @@
                           <a:ea typeface="Calibri" pitchFamily="34" charset="-122"/>
                           <a:cs typeface="Calibri" pitchFamily="34" charset="-120"/>
                         </a:rPr>
-                        <a:t>Any customer</a:t>
+                        <a:t>None — and CETES is 6.49%</a:t>
                       </a:r>
-                      <a:endParaRPr lang="en-US" sz="1250" dirty="0">
+                      <a:endParaRPr lang="en-US" sz="1100" dirty="0">
+                        <a:latin typeface="Calibri" charset="0"/>
+                        <a:ea typeface="Calibri" charset="0"/>
+                        <a:cs typeface="Calibri" charset="0"/>
+                      </a:endParaRPr>
+                    </a:p>
+                  </a:txBody>
+                  <a:tcPr marL="82296" marR="82296" marT="82296" marB="82296" anchor="ctr">
+                    <a:lnL w="12700" cap="flat" cmpd="sng" algn="ctr">
+                      <a:solidFill>
+                        <a:srgbClr val="E2DCEC"/>
+                      </a:solidFill>
+                      <a:prstDash val="solid"/>
+                      <a:round/>
+                      <a:headEnd type="none" w="med" len="med"/>
+                      <a:tailEnd type="none" w="med" len="med"/>
+                    </a:lnL>
+                    <a:lnR w="12700" cap="flat" cmpd="sng" algn="ctr">
+                      <a:solidFill>
+                        <a:srgbClr val="E2DCEC"/>
+                      </a:solidFill>
+                      <a:prstDash val="solid"/>
+                      <a:round/>
+                      <a:headEnd type="none" w="med" len="med"/>
+                      <a:tailEnd type="none" w="med" len="med"/>
+                    </a:lnR>
+                    <a:lnT w="12700" cap="flat" cmpd="sng" algn="ctr">
+                      <a:solidFill>
+                        <a:srgbClr val="E2DCEC"/>
+                      </a:solidFill>
+                      <a:prstDash val="solid"/>
+                      <a:round/>
+                      <a:headEnd type="none" w="med" len="med"/>
+                      <a:tailEnd type="none" w="med" len="med"/>
+                    </a:lnT>
+                    <a:lnB w="12700" cap="flat" cmpd="sng" algn="ctr">
+                      <a:solidFill>
+                        <a:srgbClr val="E2DCEC"/>
+                      </a:solidFill>
+                      <a:prstDash val="solid"/>
+                      <a:round/>
+                      <a:headEnd type="none" w="med" len="med"/>
+                      <a:tailEnd type="none" w="med" len="med"/>
+                    </a:lnB>
+                    <a:solidFill>
+                      <a:srgbClr val="FFFFFF"/>
+                    </a:solidFill>
+                  </a:tcPr>
+                </a:tc>
+              </a:tr>
+              <a:tr h="420624">
+                <a:tc>
+                  <a:txBody>
+                    <a:bodyPr/>
+                    <a:lstStyle/>
+                    <a:p>
+                      <a:pPr indent="0" marL="0">
+                        <a:buNone/>
+                      </a:pPr>
+                      <a:r>
+                        <a:rPr lang="en-US" sz="1200" b="1" dirty="0">
+                          <a:solidFill>
+                            <a:srgbClr val="820AD1"/>
+                          </a:solidFill>
+                          <a:latin typeface="Calibri" pitchFamily="34" charset="0"/>
+                          <a:ea typeface="Calibri" pitchFamily="34" charset="-122"/>
+                          <a:cs typeface="Calibri" pitchFamily="34" charset="-120"/>
+                        </a:rPr>
+                        <a:t>Cajita Turbo</a:t>
+                      </a:r>
+                      <a:endParaRPr lang="en-US" sz="1200" dirty="0">
                         <a:latin typeface="Calibri" charset="0"/>
                         <a:ea typeface="Calibri" charset="0"/>
                         <a:cs typeface="Calibri" charset="0"/>
@@ -11254,87 +11442,17 @@
                         <a:buNone/>
                       </a:pPr>
                       <a:r>
-                        <a:rPr lang="en-US" sz="1250" b="1" dirty="0">
+                        <a:rPr lang="en-US" sz="1200" b="1" dirty="0">
                           <a:solidFill>
-                            <a:srgbClr val="19102A"/>
+                            <a:srgbClr val="820AD1"/>
                           </a:solidFill>
                           <a:latin typeface="Calibri" pitchFamily="34" charset="0"/>
                           <a:ea typeface="Calibri" pitchFamily="34" charset="-122"/>
                           <a:cs typeface="Calibri" pitchFamily="34" charset="-120"/>
                         </a:rPr>
-                        <a:t>Recurring income lands at Nu — documented or observed</a:t>
+                        <a:t>13.00%</a:t>
                       </a:r>
-                      <a:endParaRPr lang="en-US" sz="1250" dirty="0">
-                        <a:latin typeface="Calibri" charset="0"/>
-                        <a:ea typeface="Calibri" charset="0"/>
-                        <a:cs typeface="Calibri" charset="0"/>
-                      </a:endParaRPr>
-                    </a:p>
-                  </a:txBody>
-                  <a:tcPr marL="82296" marR="82296" marT="82296" marB="82296" anchor="ctr">
-                    <a:lnL w="12700" cap="flat" cmpd="sng" algn="ctr">
-                      <a:solidFill>
-                        <a:srgbClr val="E2DCEC"/>
-                      </a:solidFill>
-                      <a:prstDash val="solid"/>
-                      <a:round/>
-                      <a:headEnd type="none" w="med" len="med"/>
-                      <a:tailEnd type="none" w="med" len="med"/>
-                    </a:lnL>
-                    <a:lnR w="12700" cap="flat" cmpd="sng" algn="ctr">
-                      <a:solidFill>
-                        <a:srgbClr val="E2DCEC"/>
-                      </a:solidFill>
-                      <a:prstDash val="solid"/>
-                      <a:round/>
-                      <a:headEnd type="none" w="med" len="med"/>
-                      <a:tailEnd type="none" w="med" len="med"/>
-                    </a:lnR>
-                    <a:lnT w="12700" cap="flat" cmpd="sng" algn="ctr">
-                      <a:solidFill>
-                        <a:srgbClr val="E2DCEC"/>
-                      </a:solidFill>
-                      <a:prstDash val="solid"/>
-                      <a:round/>
-                      <a:headEnd type="none" w="med" len="med"/>
-                      <a:tailEnd type="none" w="med" len="med"/>
-                    </a:lnT>
-                    <a:lnB w="12700" cap="flat" cmpd="sng" algn="ctr">
-                      <a:solidFill>
-                        <a:srgbClr val="E2DCEC"/>
-                      </a:solidFill>
-                      <a:prstDash val="solid"/>
-                      <a:round/>
-                      <a:headEnd type="none" w="med" len="med"/>
-                      <a:tailEnd type="none" w="med" len="med"/>
-                    </a:lnB>
-                    <a:solidFill>
-                      <a:srgbClr val="FFFFFF"/>
-                    </a:solidFill>
-                  </a:tcPr>
-                </a:tc>
-              </a:tr>
-              <a:tr h="402336">
-                <a:tc>
-                  <a:txBody>
-                    <a:bodyPr/>
-                    <a:lstStyle/>
-                    <a:p>
-                      <a:pPr indent="0" marL="0">
-                        <a:buNone/>
-                      </a:pPr>
-                      <a:r>
-                        <a:rPr lang="en-US" sz="1150" b="1" dirty="0">
-                          <a:solidFill>
-                            <a:srgbClr val="6E6484"/>
-                          </a:solidFill>
-                          <a:latin typeface="Calibri" pitchFamily="34" charset="0"/>
-                          <a:ea typeface="Calibri" pitchFamily="34" charset="-122"/>
-                          <a:cs typeface="Calibri" pitchFamily="34" charset="-120"/>
-                        </a:rPr>
-                        <a:t>Yield</a:t>
-                      </a:r>
-                      <a:endParaRPr lang="en-US" sz="1150" dirty="0">
+                      <a:endParaRPr lang="en-US" sz="1200" dirty="0">
                         <a:latin typeface="Calibri" charset="0"/>
                         <a:ea typeface="Calibri" charset="0"/>
                         <a:cs typeface="Calibri" charset="0"/>
@@ -11392,7 +11510,7 @@
                         <a:buNone/>
                       </a:pPr>
                       <a:r>
-                        <a:rPr lang="en-US" sz="1250" dirty="0">
+                        <a:rPr lang="en-US" sz="1100" dirty="0">
                           <a:solidFill>
                             <a:srgbClr val="2F2740"/>
                           </a:solidFill>
@@ -11400,9 +11518,79 @@
                           <a:ea typeface="Calibri" pitchFamily="34" charset="-122"/>
                           <a:cs typeface="Calibri" pitchFamily="34" charset="-120"/>
                         </a:rPr>
-                        <a:t>CETES + 1.5%</a:t>
+                        <a:t>Capped at MX$25,000 · one card purchase a month</a:t>
                       </a:r>
-                      <a:endParaRPr lang="en-US" sz="1250" dirty="0">
+                      <a:endParaRPr lang="en-US" sz="1100" dirty="0">
+                        <a:latin typeface="Calibri" charset="0"/>
+                        <a:ea typeface="Calibri" charset="0"/>
+                        <a:cs typeface="Calibri" charset="0"/>
+                      </a:endParaRPr>
+                    </a:p>
+                  </a:txBody>
+                  <a:tcPr marL="82296" marR="82296" marT="82296" marB="82296" anchor="ctr">
+                    <a:lnL w="12700" cap="flat" cmpd="sng" algn="ctr">
+                      <a:solidFill>
+                        <a:srgbClr val="E2DCEC"/>
+                      </a:solidFill>
+                      <a:prstDash val="solid"/>
+                      <a:round/>
+                      <a:headEnd type="none" w="med" len="med"/>
+                      <a:tailEnd type="none" w="med" len="med"/>
+                    </a:lnL>
+                    <a:lnR w="12700" cap="flat" cmpd="sng" algn="ctr">
+                      <a:solidFill>
+                        <a:srgbClr val="E2DCEC"/>
+                      </a:solidFill>
+                      <a:prstDash val="solid"/>
+                      <a:round/>
+                      <a:headEnd type="none" w="med" len="med"/>
+                      <a:tailEnd type="none" w="med" len="med"/>
+                    </a:lnR>
+                    <a:lnT w="12700" cap="flat" cmpd="sng" algn="ctr">
+                      <a:solidFill>
+                        <a:srgbClr val="E2DCEC"/>
+                      </a:solidFill>
+                      <a:prstDash val="solid"/>
+                      <a:round/>
+                      <a:headEnd type="none" w="med" len="med"/>
+                      <a:tailEnd type="none" w="med" len="med"/>
+                    </a:lnT>
+                    <a:lnB w="12700" cap="flat" cmpd="sng" algn="ctr">
+                      <a:solidFill>
+                        <a:srgbClr val="E2DCEC"/>
+                      </a:solidFill>
+                      <a:prstDash val="solid"/>
+                      <a:round/>
+                      <a:headEnd type="none" w="med" len="med"/>
+                      <a:tailEnd type="none" w="med" len="med"/>
+                    </a:lnB>
+                    <a:solidFill>
+                      <a:srgbClr val="FFFFFF"/>
+                    </a:solidFill>
+                  </a:tcPr>
+                </a:tc>
+              </a:tr>
+              <a:tr h="420624">
+                <a:tc>
+                  <a:txBody>
+                    <a:bodyPr/>
+                    <a:lstStyle/>
+                    <a:p>
+                      <a:pPr indent="0" marL="0">
+                        <a:buNone/>
+                      </a:pPr>
+                      <a:r>
+                        <a:rPr lang="en-US" sz="1200" b="1" dirty="0">
+                          <a:solidFill>
+                            <a:srgbClr val="19102A"/>
+                          </a:solidFill>
+                          <a:latin typeface="Calibri" pitchFamily="34" charset="0"/>
+                          <a:ea typeface="Calibri" pitchFamily="34" charset="-122"/>
+                          <a:cs typeface="Calibri" pitchFamily="34" charset="-120"/>
+                        </a:rPr>
+                        <a:t>Ahorro Congelado</a:t>
+                      </a:r>
+                      <a:endParaRPr lang="en-US" sz="1200" dirty="0">
                         <a:latin typeface="Calibri" charset="0"/>
                         <a:ea typeface="Calibri" charset="0"/>
                         <a:cs typeface="Calibri" charset="0"/>
@@ -11460,7 +11648,7 @@
                         <a:buNone/>
                       </a:pPr>
                       <a:r>
-                        <a:rPr lang="en-US" sz="1250" b="1" dirty="0">
+                        <a:rPr lang="en-US" sz="1200" b="1" dirty="0">
                           <a:solidFill>
                             <a:srgbClr val="19102A"/>
                           </a:solidFill>
@@ -11468,79 +11656,9 @@
                           <a:ea typeface="Calibri" pitchFamily="34" charset="-122"/>
                           <a:cs typeface="Calibri" pitchFamily="34" charset="-120"/>
                         </a:rPr>
-                        <a:t>CETES + 4.0%, up to a balance cap</a:t>
+                        <a:t>6.55–6.80%</a:t>
                       </a:r>
-                      <a:endParaRPr lang="en-US" sz="1250" dirty="0">
-                        <a:latin typeface="Calibri" charset="0"/>
-                        <a:ea typeface="Calibri" charset="0"/>
-                        <a:cs typeface="Calibri" charset="0"/>
-                      </a:endParaRPr>
-                    </a:p>
-                  </a:txBody>
-                  <a:tcPr marL="82296" marR="82296" marT="82296" marB="82296" anchor="ctr">
-                    <a:lnL w="12700" cap="flat" cmpd="sng" algn="ctr">
-                      <a:solidFill>
-                        <a:srgbClr val="E2DCEC"/>
-                      </a:solidFill>
-                      <a:prstDash val="solid"/>
-                      <a:round/>
-                      <a:headEnd type="none" w="med" len="med"/>
-                      <a:tailEnd type="none" w="med" len="med"/>
-                    </a:lnL>
-                    <a:lnR w="12700" cap="flat" cmpd="sng" algn="ctr">
-                      <a:solidFill>
-                        <a:srgbClr val="E2DCEC"/>
-                      </a:solidFill>
-                      <a:prstDash val="solid"/>
-                      <a:round/>
-                      <a:headEnd type="none" w="med" len="med"/>
-                      <a:tailEnd type="none" w="med" len="med"/>
-                    </a:lnR>
-                    <a:lnT w="12700" cap="flat" cmpd="sng" algn="ctr">
-                      <a:solidFill>
-                        <a:srgbClr val="E2DCEC"/>
-                      </a:solidFill>
-                      <a:prstDash val="solid"/>
-                      <a:round/>
-                      <a:headEnd type="none" w="med" len="med"/>
-                      <a:tailEnd type="none" w="med" len="med"/>
-                    </a:lnT>
-                    <a:lnB w="12700" cap="flat" cmpd="sng" algn="ctr">
-                      <a:solidFill>
-                        <a:srgbClr val="E2DCEC"/>
-                      </a:solidFill>
-                      <a:prstDash val="solid"/>
-                      <a:round/>
-                      <a:headEnd type="none" w="med" len="med"/>
-                      <a:tailEnd type="none" w="med" len="med"/>
-                    </a:lnB>
-                    <a:solidFill>
-                      <a:srgbClr val="FFFFFF"/>
-                    </a:solidFill>
-                  </a:tcPr>
-                </a:tc>
-              </a:tr>
-              <a:tr h="402336">
-                <a:tc>
-                  <a:txBody>
-                    <a:bodyPr/>
-                    <a:lstStyle/>
-                    <a:p>
-                      <a:pPr indent="0" marL="0">
-                        <a:buNone/>
-                      </a:pPr>
-                      <a:r>
-                        <a:rPr lang="en-US" sz="1150" b="1" dirty="0">
-                          <a:solidFill>
-                            <a:srgbClr val="6E6484"/>
-                          </a:solidFill>
-                          <a:latin typeface="Calibri" pitchFamily="34" charset="0"/>
-                          <a:ea typeface="Calibri" pitchFamily="34" charset="-122"/>
-                          <a:cs typeface="Calibri" pitchFamily="34" charset="-120"/>
-                        </a:rPr>
-                        <a:t>Credit</a:t>
-                      </a:r>
-                      <a:endParaRPr lang="en-US" sz="1150" dirty="0">
+                      <a:endParaRPr lang="en-US" sz="1200" dirty="0">
                         <a:latin typeface="Calibri" charset="0"/>
                         <a:ea typeface="Calibri" charset="0"/>
                         <a:cs typeface="Calibri" charset="0"/>
@@ -11598,7 +11716,7 @@
                         <a:buNone/>
                       </a:pPr>
                       <a:r>
-                        <a:rPr lang="en-US" sz="1250" dirty="0">
+                        <a:rPr lang="en-US" sz="1100" dirty="0">
                           <a:solidFill>
                             <a:srgbClr val="2F2740"/>
                           </a:solidFill>
@@ -11606,489 +11724,9 @@
                           <a:ea typeface="Calibri" pitchFamily="34" charset="-122"/>
                           <a:cs typeface="Calibri" pitchFamily="34" charset="-120"/>
                         </a:rPr>
-                        <a:t>Score-based, thin</a:t>
+                        <a:t>By term</a:t>
                       </a:r>
-                      <a:endParaRPr lang="en-US" sz="1250" dirty="0">
-                        <a:latin typeface="Calibri" charset="0"/>
-                        <a:ea typeface="Calibri" charset="0"/>
-                        <a:cs typeface="Calibri" charset="0"/>
-                      </a:endParaRPr>
-                    </a:p>
-                  </a:txBody>
-                  <a:tcPr marL="82296" marR="82296" marT="82296" marB="82296" anchor="ctr">
-                    <a:lnL w="12700" cap="flat" cmpd="sng" algn="ctr">
-                      <a:solidFill>
-                        <a:srgbClr val="E2DCEC"/>
-                      </a:solidFill>
-                      <a:prstDash val="solid"/>
-                      <a:round/>
-                      <a:headEnd type="none" w="med" len="med"/>
-                      <a:tailEnd type="none" w="med" len="med"/>
-                    </a:lnL>
-                    <a:lnR w="12700" cap="flat" cmpd="sng" algn="ctr">
-                      <a:solidFill>
-                        <a:srgbClr val="E2DCEC"/>
-                      </a:solidFill>
-                      <a:prstDash val="solid"/>
-                      <a:round/>
-                      <a:headEnd type="none" w="med" len="med"/>
-                      <a:tailEnd type="none" w="med" len="med"/>
-                    </a:lnR>
-                    <a:lnT w="12700" cap="flat" cmpd="sng" algn="ctr">
-                      <a:solidFill>
-                        <a:srgbClr val="E2DCEC"/>
-                      </a:solidFill>
-                      <a:prstDash val="solid"/>
-                      <a:round/>
-                      <a:headEnd type="none" w="med" len="med"/>
-                      <a:tailEnd type="none" w="med" len="med"/>
-                    </a:lnT>
-                    <a:lnB w="12700" cap="flat" cmpd="sng" algn="ctr">
-                      <a:solidFill>
-                        <a:srgbClr val="E2DCEC"/>
-                      </a:solidFill>
-                      <a:prstDash val="solid"/>
-                      <a:round/>
-                      <a:headEnd type="none" w="med" len="med"/>
-                      <a:tailEnd type="none" w="med" len="med"/>
-                    </a:lnB>
-                    <a:solidFill>
-                      <a:srgbClr val="FFFFFF"/>
-                    </a:solidFill>
-                  </a:tcPr>
-                </a:tc>
-                <a:tc>
-                  <a:txBody>
-                    <a:bodyPr/>
-                    <a:lstStyle/>
-                    <a:p>
-                      <a:pPr indent="0" marL="0">
-                        <a:buNone/>
-                      </a:pPr>
-                      <a:r>
-                        <a:rPr lang="en-US" sz="1250" b="1" dirty="0">
-                          <a:solidFill>
-                            <a:srgbClr val="19102A"/>
-                          </a:solidFill>
-                          <a:latin typeface="Calibri" pitchFamily="34" charset="0"/>
-                          <a:ea typeface="Calibri" pitchFamily="34" charset="-122"/>
-                          <a:cs typeface="Calibri" pitchFamily="34" charset="-120"/>
-                        </a:rPr>
-                        <a:t>Line sized on observed income</a:t>
-                      </a:r>
-                      <a:endParaRPr lang="en-US" sz="1250" dirty="0">
-                        <a:latin typeface="Calibri" charset="0"/>
-                        <a:ea typeface="Calibri" charset="0"/>
-                        <a:cs typeface="Calibri" charset="0"/>
-                      </a:endParaRPr>
-                    </a:p>
-                  </a:txBody>
-                  <a:tcPr marL="82296" marR="82296" marT="82296" marB="82296" anchor="ctr">
-                    <a:lnL w="12700" cap="flat" cmpd="sng" algn="ctr">
-                      <a:solidFill>
-                        <a:srgbClr val="E2DCEC"/>
-                      </a:solidFill>
-                      <a:prstDash val="solid"/>
-                      <a:round/>
-                      <a:headEnd type="none" w="med" len="med"/>
-                      <a:tailEnd type="none" w="med" len="med"/>
-                    </a:lnL>
-                    <a:lnR w="12700" cap="flat" cmpd="sng" algn="ctr">
-                      <a:solidFill>
-                        <a:srgbClr val="E2DCEC"/>
-                      </a:solidFill>
-                      <a:prstDash val="solid"/>
-                      <a:round/>
-                      <a:headEnd type="none" w="med" len="med"/>
-                      <a:tailEnd type="none" w="med" len="med"/>
-                    </a:lnR>
-                    <a:lnT w="12700" cap="flat" cmpd="sng" algn="ctr">
-                      <a:solidFill>
-                        <a:srgbClr val="E2DCEC"/>
-                      </a:solidFill>
-                      <a:prstDash val="solid"/>
-                      <a:round/>
-                      <a:headEnd type="none" w="med" len="med"/>
-                      <a:tailEnd type="none" w="med" len="med"/>
-                    </a:lnT>
-                    <a:lnB w="12700" cap="flat" cmpd="sng" algn="ctr">
-                      <a:solidFill>
-                        <a:srgbClr val="E2DCEC"/>
-                      </a:solidFill>
-                      <a:prstDash val="solid"/>
-                      <a:round/>
-                      <a:headEnd type="none" w="med" len="med"/>
-                      <a:tailEnd type="none" w="med" len="med"/>
-                    </a:lnB>
-                    <a:solidFill>
-                      <a:srgbClr val="FFFFFF"/>
-                    </a:solidFill>
-                  </a:tcPr>
-                </a:tc>
-              </a:tr>
-              <a:tr h="402336">
-                <a:tc>
-                  <a:txBody>
-                    <a:bodyPr/>
-                    <a:lstStyle/>
-                    <a:p>
-                      <a:pPr indent="0" marL="0">
-                        <a:buNone/>
-                      </a:pPr>
-                      <a:r>
-                        <a:rPr lang="en-US" sz="1150" b="1" dirty="0">
-                          <a:solidFill>
-                            <a:srgbClr val="6E6484"/>
-                          </a:solidFill>
-                          <a:latin typeface="Calibri" pitchFamily="34" charset="0"/>
-                          <a:ea typeface="Calibri" pitchFamily="34" charset="-122"/>
-                          <a:cs typeface="Calibri" pitchFamily="34" charset="-120"/>
-                        </a:rPr>
-                        <a:t>Protection</a:t>
-                      </a:r>
-                      <a:endParaRPr lang="en-US" sz="1150" dirty="0">
-                        <a:latin typeface="Calibri" charset="0"/>
-                        <a:ea typeface="Calibri" charset="0"/>
-                        <a:cs typeface="Calibri" charset="0"/>
-                      </a:endParaRPr>
-                    </a:p>
-                  </a:txBody>
-                  <a:tcPr marL="82296" marR="82296" marT="82296" marB="82296" anchor="ctr">
-                    <a:lnL w="12700" cap="flat" cmpd="sng" algn="ctr">
-                      <a:solidFill>
-                        <a:srgbClr val="E2DCEC"/>
-                      </a:solidFill>
-                      <a:prstDash val="solid"/>
-                      <a:round/>
-                      <a:headEnd type="none" w="med" len="med"/>
-                      <a:tailEnd type="none" w="med" len="med"/>
-                    </a:lnL>
-                    <a:lnR w="12700" cap="flat" cmpd="sng" algn="ctr">
-                      <a:solidFill>
-                        <a:srgbClr val="E2DCEC"/>
-                      </a:solidFill>
-                      <a:prstDash val="solid"/>
-                      <a:round/>
-                      <a:headEnd type="none" w="med" len="med"/>
-                      <a:tailEnd type="none" w="med" len="med"/>
-                    </a:lnR>
-                    <a:lnT w="12700" cap="flat" cmpd="sng" algn="ctr">
-                      <a:solidFill>
-                        <a:srgbClr val="E2DCEC"/>
-                      </a:solidFill>
-                      <a:prstDash val="solid"/>
-                      <a:round/>
-                      <a:headEnd type="none" w="med" len="med"/>
-                      <a:tailEnd type="none" w="med" len="med"/>
-                    </a:lnT>
-                    <a:lnB w="12700" cap="flat" cmpd="sng" algn="ctr">
-                      <a:solidFill>
-                        <a:srgbClr val="E2DCEC"/>
-                      </a:solidFill>
-                      <a:prstDash val="solid"/>
-                      <a:round/>
-                      <a:headEnd type="none" w="med" len="med"/>
-                      <a:tailEnd type="none" w="med" len="med"/>
-                    </a:lnB>
-                    <a:solidFill>
-                      <a:srgbClr val="FFFFFF"/>
-                    </a:solidFill>
-                  </a:tcPr>
-                </a:tc>
-                <a:tc>
-                  <a:txBody>
-                    <a:bodyPr/>
-                    <a:lstStyle/>
-                    <a:p>
-                      <a:pPr indent="0" marL="0">
-                        <a:buNone/>
-                      </a:pPr>
-                      <a:r>
-                        <a:rPr lang="en-US" sz="1250" dirty="0">
-                          <a:solidFill>
-                            <a:srgbClr val="2F2740"/>
-                          </a:solidFill>
-                          <a:latin typeface="Calibri" pitchFamily="34" charset="0"/>
-                          <a:ea typeface="Calibri" pitchFamily="34" charset="-122"/>
-                          <a:cs typeface="Calibri" pitchFamily="34" charset="-120"/>
-                        </a:rPr>
-                        <a:t>Optional</a:t>
-                      </a:r>
-                      <a:endParaRPr lang="en-US" sz="1250" dirty="0">
-                        <a:latin typeface="Calibri" charset="0"/>
-                        <a:ea typeface="Calibri" charset="0"/>
-                        <a:cs typeface="Calibri" charset="0"/>
-                      </a:endParaRPr>
-                    </a:p>
-                  </a:txBody>
-                  <a:tcPr marL="82296" marR="82296" marT="82296" marB="82296" anchor="ctr">
-                    <a:lnL w="12700" cap="flat" cmpd="sng" algn="ctr">
-                      <a:solidFill>
-                        <a:srgbClr val="E2DCEC"/>
-                      </a:solidFill>
-                      <a:prstDash val="solid"/>
-                      <a:round/>
-                      <a:headEnd type="none" w="med" len="med"/>
-                      <a:tailEnd type="none" w="med" len="med"/>
-                    </a:lnL>
-                    <a:lnR w="12700" cap="flat" cmpd="sng" algn="ctr">
-                      <a:solidFill>
-                        <a:srgbClr val="E2DCEC"/>
-                      </a:solidFill>
-                      <a:prstDash val="solid"/>
-                      <a:round/>
-                      <a:headEnd type="none" w="med" len="med"/>
-                      <a:tailEnd type="none" w="med" len="med"/>
-                    </a:lnR>
-                    <a:lnT w="12700" cap="flat" cmpd="sng" algn="ctr">
-                      <a:solidFill>
-                        <a:srgbClr val="E2DCEC"/>
-                      </a:solidFill>
-                      <a:prstDash val="solid"/>
-                      <a:round/>
-                      <a:headEnd type="none" w="med" len="med"/>
-                      <a:tailEnd type="none" w="med" len="med"/>
-                    </a:lnT>
-                    <a:lnB w="12700" cap="flat" cmpd="sng" algn="ctr">
-                      <a:solidFill>
-                        <a:srgbClr val="E2DCEC"/>
-                      </a:solidFill>
-                      <a:prstDash val="solid"/>
-                      <a:round/>
-                      <a:headEnd type="none" w="med" len="med"/>
-                      <a:tailEnd type="none" w="med" len="med"/>
-                    </a:lnB>
-                    <a:solidFill>
-                      <a:srgbClr val="FFFFFF"/>
-                    </a:solidFill>
-                  </a:tcPr>
-                </a:tc>
-                <a:tc>
-                  <a:txBody>
-                    <a:bodyPr/>
-                    <a:lstStyle/>
-                    <a:p>
-                      <a:pPr indent="0" marL="0">
-                        <a:buNone/>
-                      </a:pPr>
-                      <a:r>
-                        <a:rPr lang="en-US" sz="1250" b="1" dirty="0">
-                          <a:solidFill>
-                            <a:srgbClr val="19102A"/>
-                          </a:solidFill>
-                          <a:latin typeface="Calibri" pitchFamily="34" charset="0"/>
-                          <a:ea typeface="Calibri" pitchFamily="34" charset="-122"/>
-                          <a:cs typeface="Calibri" pitchFamily="34" charset="-120"/>
-                        </a:rPr>
-                        <a:t>Micro-cover included</a:t>
-                      </a:r>
-                      <a:endParaRPr lang="en-US" sz="1250" dirty="0">
-                        <a:latin typeface="Calibri" charset="0"/>
-                        <a:ea typeface="Calibri" charset="0"/>
-                        <a:cs typeface="Calibri" charset="0"/>
-                      </a:endParaRPr>
-                    </a:p>
-                  </a:txBody>
-                  <a:tcPr marL="82296" marR="82296" marT="82296" marB="82296" anchor="ctr">
-                    <a:lnL w="12700" cap="flat" cmpd="sng" algn="ctr">
-                      <a:solidFill>
-                        <a:srgbClr val="E2DCEC"/>
-                      </a:solidFill>
-                      <a:prstDash val="solid"/>
-                      <a:round/>
-                      <a:headEnd type="none" w="med" len="med"/>
-                      <a:tailEnd type="none" w="med" len="med"/>
-                    </a:lnL>
-                    <a:lnR w="12700" cap="flat" cmpd="sng" algn="ctr">
-                      <a:solidFill>
-                        <a:srgbClr val="E2DCEC"/>
-                      </a:solidFill>
-                      <a:prstDash val="solid"/>
-                      <a:round/>
-                      <a:headEnd type="none" w="med" len="med"/>
-                      <a:tailEnd type="none" w="med" len="med"/>
-                    </a:lnR>
-                    <a:lnT w="12700" cap="flat" cmpd="sng" algn="ctr">
-                      <a:solidFill>
-                        <a:srgbClr val="E2DCEC"/>
-                      </a:solidFill>
-                      <a:prstDash val="solid"/>
-                      <a:round/>
-                      <a:headEnd type="none" w="med" len="med"/>
-                      <a:tailEnd type="none" w="med" len="med"/>
-                    </a:lnT>
-                    <a:lnB w="12700" cap="flat" cmpd="sng" algn="ctr">
-                      <a:solidFill>
-                        <a:srgbClr val="E2DCEC"/>
-                      </a:solidFill>
-                      <a:prstDash val="solid"/>
-                      <a:round/>
-                      <a:headEnd type="none" w="med" len="med"/>
-                      <a:tailEnd type="none" w="med" len="med"/>
-                    </a:lnB>
-                    <a:solidFill>
-                      <a:srgbClr val="FFFFFF"/>
-                    </a:solidFill>
-                  </a:tcPr>
-                </a:tc>
-              </a:tr>
-              <a:tr h="402336">
-                <a:tc>
-                  <a:txBody>
-                    <a:bodyPr/>
-                    <a:lstStyle/>
-                    <a:p>
-                      <a:pPr indent="0" marL="0">
-                        <a:buNone/>
-                      </a:pPr>
-                      <a:r>
-                        <a:rPr lang="en-US" sz="1150" b="1" dirty="0">
-                          <a:solidFill>
-                            <a:srgbClr val="6E6484"/>
-                          </a:solidFill>
-                          <a:latin typeface="Calibri" pitchFamily="34" charset="0"/>
-                          <a:ea typeface="Calibri" pitchFamily="34" charset="-122"/>
-                          <a:cs typeface="Calibri" pitchFamily="34" charset="-120"/>
-                        </a:rPr>
-                        <a:t>What it costs us</a:t>
-                      </a:r>
-                      <a:endParaRPr lang="en-US" sz="1150" dirty="0">
-                        <a:latin typeface="Calibri" charset="0"/>
-                        <a:ea typeface="Calibri" charset="0"/>
-                        <a:cs typeface="Calibri" charset="0"/>
-                      </a:endParaRPr>
-                    </a:p>
-                  </a:txBody>
-                  <a:tcPr marL="82296" marR="82296" marT="82296" marB="82296" anchor="ctr">
-                    <a:lnL w="12700" cap="flat" cmpd="sng" algn="ctr">
-                      <a:solidFill>
-                        <a:srgbClr val="E2DCEC"/>
-                      </a:solidFill>
-                      <a:prstDash val="solid"/>
-                      <a:round/>
-                      <a:headEnd type="none" w="med" len="med"/>
-                      <a:tailEnd type="none" w="med" len="med"/>
-                    </a:lnL>
-                    <a:lnR w="12700" cap="flat" cmpd="sng" algn="ctr">
-                      <a:solidFill>
-                        <a:srgbClr val="E2DCEC"/>
-                      </a:solidFill>
-                      <a:prstDash val="solid"/>
-                      <a:round/>
-                      <a:headEnd type="none" w="med" len="med"/>
-                      <a:tailEnd type="none" w="med" len="med"/>
-                    </a:lnR>
-                    <a:lnT w="12700" cap="flat" cmpd="sng" algn="ctr">
-                      <a:solidFill>
-                        <a:srgbClr val="E2DCEC"/>
-                      </a:solidFill>
-                      <a:prstDash val="solid"/>
-                      <a:round/>
-                      <a:headEnd type="none" w="med" len="med"/>
-                      <a:tailEnd type="none" w="med" len="med"/>
-                    </a:lnT>
-                    <a:lnB w="12700" cap="flat" cmpd="sng" algn="ctr">
-                      <a:solidFill>
-                        <a:srgbClr val="E2DCEC"/>
-                      </a:solidFill>
-                      <a:prstDash val="solid"/>
-                      <a:round/>
-                      <a:headEnd type="none" w="med" len="med"/>
-                      <a:tailEnd type="none" w="med" len="med"/>
-                    </a:lnB>
-                    <a:solidFill>
-                      <a:srgbClr val="FFFFFF"/>
-                    </a:solidFill>
-                  </a:tcPr>
-                </a:tc>
-                <a:tc>
-                  <a:txBody>
-                    <a:bodyPr/>
-                    <a:lstStyle/>
-                    <a:p>
-                      <a:pPr indent="0" marL="0">
-                        <a:buNone/>
-                      </a:pPr>
-                      <a:r>
-                        <a:rPr lang="en-US" sz="1250" dirty="0">
-                          <a:solidFill>
-                            <a:srgbClr val="2F2740"/>
-                          </a:solidFill>
-                          <a:latin typeface="Calibri" pitchFamily="34" charset="0"/>
-                          <a:ea typeface="Calibri" pitchFamily="34" charset="-122"/>
-                          <a:cs typeface="Calibri" pitchFamily="34" charset="-120"/>
-                        </a:rPr>
-                        <a:t>Low</a:t>
-                      </a:r>
-                      <a:endParaRPr lang="en-US" sz="1250" dirty="0">
-                        <a:latin typeface="Calibri" charset="0"/>
-                        <a:ea typeface="Calibri" charset="0"/>
-                        <a:cs typeface="Calibri" charset="0"/>
-                      </a:endParaRPr>
-                    </a:p>
-                  </a:txBody>
-                  <a:tcPr marL="82296" marR="82296" marT="82296" marB="82296" anchor="ctr">
-                    <a:lnL w="12700" cap="flat" cmpd="sng" algn="ctr">
-                      <a:solidFill>
-                        <a:srgbClr val="E2DCEC"/>
-                      </a:solidFill>
-                      <a:prstDash val="solid"/>
-                      <a:round/>
-                      <a:headEnd type="none" w="med" len="med"/>
-                      <a:tailEnd type="none" w="med" len="med"/>
-                    </a:lnL>
-                    <a:lnR w="12700" cap="flat" cmpd="sng" algn="ctr">
-                      <a:solidFill>
-                        <a:srgbClr val="E2DCEC"/>
-                      </a:solidFill>
-                      <a:prstDash val="solid"/>
-                      <a:round/>
-                      <a:headEnd type="none" w="med" len="med"/>
-                      <a:tailEnd type="none" w="med" len="med"/>
-                    </a:lnR>
-                    <a:lnT w="12700" cap="flat" cmpd="sng" algn="ctr">
-                      <a:solidFill>
-                        <a:srgbClr val="E2DCEC"/>
-                      </a:solidFill>
-                      <a:prstDash val="solid"/>
-                      <a:round/>
-                      <a:headEnd type="none" w="med" len="med"/>
-                      <a:tailEnd type="none" w="med" len="med"/>
-                    </a:lnT>
-                    <a:lnB w="12700" cap="flat" cmpd="sng" algn="ctr">
-                      <a:solidFill>
-                        <a:srgbClr val="E2DCEC"/>
-                      </a:solidFill>
-                      <a:prstDash val="solid"/>
-                      <a:round/>
-                      <a:headEnd type="none" w="med" len="med"/>
-                      <a:tailEnd type="none" w="med" len="med"/>
-                    </a:lnB>
-                    <a:solidFill>
-                      <a:srgbClr val="FFFFFF"/>
-                    </a:solidFill>
-                  </a:tcPr>
-                </a:tc>
-                <a:tc>
-                  <a:txBody>
-                    <a:bodyPr/>
-                    <a:lstStyle/>
-                    <a:p>
-                      <a:pPr indent="0" marL="0">
-                        <a:buNone/>
-                      </a:pPr>
-                      <a:r>
-                        <a:rPr lang="en-US" sz="1250" b="1" dirty="0">
-                          <a:solidFill>
-                            <a:srgbClr val="19102A"/>
-                          </a:solidFill>
-                          <a:latin typeface="Calibri" pitchFamily="34" charset="0"/>
-                          <a:ea typeface="Calibri" pitchFamily="34" charset="-122"/>
-                          <a:cs typeface="Calibri" pitchFamily="34" charset="-120"/>
-                        </a:rPr>
-                        <a:t>Lower per peso of balance</a:t>
-                      </a:r>
-                      <a:endParaRPr lang="en-US" sz="1250" dirty="0">
+                      <a:endParaRPr lang="en-US" sz="1100" dirty="0">
                         <a:latin typeface="Calibri" charset="0"/>
                         <a:ea typeface="Calibri" charset="0"/>
                         <a:cs typeface="Calibri" charset="0"/>
@@ -12144,14 +11782,125 @@
       </p:graphicFrame>
       <p:sp>
         <p:nvSpPr>
-          <p:cNvPr id="6" name="Shape 3"/>
+          <p:cNvPr id="7" name="Shape 4"/>
           <p:cNvSpPr/>
           <p:nvPr/>
         </p:nvSpPr>
         <p:spPr>
           <a:xfrm>
-            <a:off x="7360920" y="1783080"/>
-            <a:ext cx="4279392" cy="3977640"/>
+            <a:off x="566928" y="3977640"/>
+            <a:ext cx="5760720" cy="1737360"/>
+          </a:xfrm>
+          <a:prstGeom prst="roundRect">
+            <a:avLst>
+              <a:gd name="adj" fmla="val 3158"/>
+            </a:avLst>
+          </a:prstGeom>
+          <a:solidFill>
+            <a:srgbClr val="F3E8FD"/>
+          </a:solidFill>
+          <a:ln w="12700">
+            <a:solidFill>
+              <a:srgbClr val="E2DCEC"/>
+            </a:solidFill>
+            <a:prstDash val="solid"/>
+          </a:ln>
+        </p:spPr>
+      </p:sp>
+      <p:sp>
+        <p:nvSpPr>
+          <p:cNvPr id="8" name="Text 5"/>
+          <p:cNvSpPr txBox="1"/>
+          <p:nvPr/>
+        </p:nvSpPr>
+        <p:spPr>
+          <a:xfrm>
+            <a:off x="841248" y="4160520"/>
+            <a:ext cx="5257800" cy="402336"/>
+          </a:xfrm>
+          <a:prstGeom prst="rect">
+            <a:avLst/>
+          </a:prstGeom>
+          <a:noFill/>
+          <a:ln/>
+        </p:spPr>
+        <p:txBody>
+          <a:bodyPr wrap="square" lIns="0" tIns="0" rIns="0" bIns="0" rtlCol="0" anchor="ctr"/>
+          <a:lstStyle/>
+          <a:p>
+            <a:pPr indent="0" marL="0">
+              <a:lnSpc>
+                <a:spcPts val="1800"/>
+              </a:lnSpc>
+              <a:buNone/>
+            </a:pPr>
+            <a:r>
+              <a:rPr lang="en-US" sz="1350" b="1" dirty="0">
+                <a:solidFill>
+                  <a:srgbClr val="19102A"/>
+                </a:solidFill>
+                <a:latin typeface="Arial" pitchFamily="34" charset="0"/>
+                <a:ea typeface="Arial" pitchFamily="34" charset="-122"/>
+                <a:cs typeface="Arial" pitchFamily="34" charset="-120"/>
+              </a:rPr>
+              <a:t>The tiering, the cap and the behavioural gate are already built.</a:t>
+            </a:r>
+            <a:endParaRPr lang="en-US" sz="1350" dirty="0"/>
+          </a:p>
+        </p:txBody>
+      </p:sp>
+      <p:sp>
+        <p:nvSpPr>
+          <p:cNvPr id="9" name="Text 6"/>
+          <p:cNvSpPr txBox="1"/>
+          <p:nvPr/>
+        </p:nvSpPr>
+        <p:spPr>
+          <a:xfrm>
+            <a:off x="841248" y="4590288"/>
+            <a:ext cx="5257800" cy="1005840"/>
+          </a:xfrm>
+          <a:prstGeom prst="rect">
+            <a:avLst/>
+          </a:prstGeom>
+          <a:noFill/>
+          <a:ln/>
+        </p:spPr>
+        <p:txBody>
+          <a:bodyPr wrap="square" lIns="0" tIns="0" rIns="0" bIns="0" rtlCol="0" anchor="ctr"/>
+          <a:lstStyle/>
+          <a:p>
+            <a:pPr indent="0" marL="0">
+              <a:lnSpc>
+                <a:spcPts val="1700"/>
+              </a:lnSpc>
+              <a:buNone/>
+            </a:pPr>
+            <a:r>
+              <a:rPr lang="en-US" sz="1250" dirty="0">
+                <a:solidFill>
+                  <a:srgbClr val="2F2740"/>
+                </a:solidFill>
+                <a:latin typeface="Calibri" pitchFamily="34" charset="0"/>
+                <a:ea typeface="Calibri" pitchFamily="34" charset="-122"/>
+                <a:cs typeface="Calibri" pitchFamily="34" charset="-120"/>
+              </a:rPr>
+              <a:t>The base tier already sits at the risk-free rate, and Turbo was already cut from 15% to 13% in January. The unsolved problem is not whether to have a premium tier. It is which gate and which cap.</a:t>
+            </a:r>
+            <a:endParaRPr lang="en-US" sz="1250" dirty="0"/>
+          </a:p>
+        </p:txBody>
+      </p:sp>
+      <p:sp>
+        <p:nvSpPr>
+          <p:cNvPr id="10" name="Shape 7"/>
+          <p:cNvSpPr/>
+          <p:nvPr/>
+        </p:nvSpPr>
+        <p:spPr>
+          <a:xfrm>
+            <a:off x="6537960" y="1737360"/>
+            <a:ext cx="5102352" cy="3977640"/>
           </a:xfrm>
           <a:prstGeom prst="roundRect">
             <a:avLst>
@@ -12171,14 +11920,14 @@
       </p:sp>
       <p:sp>
         <p:nvSpPr>
-          <p:cNvPr id="7" name="Text 4"/>
-          <p:cNvSpPr txBox="1"/>
-          <p:nvPr/>
-        </p:nvSpPr>
-        <p:spPr>
-          <a:xfrm>
-            <a:off x="7616952" y="1965960"/>
-            <a:ext cx="3840480" cy="292608"/>
+          <p:cNvPr id="11" name="Text 8"/>
+          <p:cNvSpPr txBox="1"/>
+          <p:nvPr/>
+        </p:nvSpPr>
+        <p:spPr>
+          <a:xfrm>
+            <a:off x="6793992" y="1920240"/>
+            <a:ext cx="4572000" cy="274320"/>
           </a:xfrm>
           <a:prstGeom prst="rect">
             <a:avLst/>
@@ -12202,7 +11951,7 @@
                 <a:ea typeface="Arial" pitchFamily="34" charset="-122"/>
                 <a:cs typeface="Arial" pitchFamily="34" charset="-120"/>
               </a:rPr>
-              <a:t>Four design decisions</a:t>
+              <a:t>What I would change</a:t>
             </a:r>
             <a:endParaRPr lang="en-US" sz="1500" dirty="0"/>
           </a:p>
@@ -12210,13 +11959,13 @@
       </p:sp>
       <p:sp>
         <p:nvSpPr>
-          <p:cNvPr id="8" name="Text 5"/>
-          <p:cNvSpPr txBox="1"/>
-          <p:nvPr/>
-        </p:nvSpPr>
-        <p:spPr>
-          <a:xfrm>
-            <a:off x="7616952" y="2377440"/>
+          <p:cNvPr id="12" name="Text 9"/>
+          <p:cNvSpPr txBox="1"/>
+          <p:nvPr/>
+        </p:nvSpPr>
+        <p:spPr>
+          <a:xfrm>
+            <a:off x="6793992" y="2331720"/>
             <a:ext cx="274320" cy="274320"/>
           </a:xfrm>
           <a:prstGeom prst="rect">
@@ -12249,30 +11998,30 @@
       </p:sp>
       <p:sp>
         <p:nvSpPr>
-          <p:cNvPr id="9" name="Text 6"/>
-          <p:cNvSpPr txBox="1"/>
-          <p:nvPr/>
-        </p:nvSpPr>
-        <p:spPr>
-          <a:xfrm>
-            <a:off x="7936992" y="2359152"/>
-            <a:ext cx="3566160" cy="274320"/>
-          </a:xfrm>
-          <a:prstGeom prst="rect">
-            <a:avLst/>
-          </a:prstGeom>
-          <a:noFill/>
-          <a:ln/>
-        </p:spPr>
-        <p:txBody>
-          <a:bodyPr wrap="square" lIns="0" tIns="0" rIns="0" bIns="0" rtlCol="0" anchor="ctr"/>
-          <a:lstStyle/>
-          <a:p>
-            <a:pPr indent="0" marL="0">
-              <a:buNone/>
-            </a:pPr>
-            <a:r>
-              <a:rPr lang="en-US" sz="1250" b="1" dirty="0">
+          <p:cNvPr id="13" name="Text 10"/>
+          <p:cNvSpPr txBox="1"/>
+          <p:nvPr/>
+        </p:nvSpPr>
+        <p:spPr>
+          <a:xfrm>
+            <a:off x="7114032" y="2313432"/>
+            <a:ext cx="4206240" cy="274320"/>
+          </a:xfrm>
+          <a:prstGeom prst="rect">
+            <a:avLst/>
+          </a:prstGeom>
+          <a:noFill/>
+          <a:ln/>
+        </p:spPr>
+        <p:txBody>
+          <a:bodyPr wrap="square" lIns="0" tIns="0" rIns="0" bIns="0" rtlCol="0" anchor="ctr"/>
+          <a:lstStyle/>
+          <a:p>
+            <a:pPr indent="0" marL="0">
+              <a:buNone/>
+            </a:pPr>
+            <a:r>
+              <a:rPr lang="en-US" sz="1300" b="1" dirty="0">
                 <a:solidFill>
                   <a:srgbClr val="19102A"/>
                 </a:solidFill>
@@ -12280,22 +12029,22 @@
                 <a:ea typeface="Arial" pitchFamily="34" charset="-122"/>
                 <a:cs typeface="Arial" pitchFamily="34" charset="-120"/>
               </a:rPr>
-              <a:t>Two tiers, not five.</a:t>
-            </a:r>
-            <a:endParaRPr lang="en-US" sz="1250" dirty="0"/>
-          </a:p>
-        </p:txBody>
-      </p:sp>
-      <p:sp>
-        <p:nvSpPr>
-          <p:cNvPr id="10" name="Text 7"/>
-          <p:cNvSpPr txBox="1"/>
-          <p:nvPr/>
-        </p:nvSpPr>
-        <p:spPr>
-          <a:xfrm>
-            <a:off x="7936992" y="2633472"/>
-            <a:ext cx="3566160" cy="457200"/>
+              <a:t>Change the gate.</a:t>
+            </a:r>
+            <a:endParaRPr lang="en-US" sz="1300" dirty="0"/>
+          </a:p>
+        </p:txBody>
+      </p:sp>
+      <p:sp>
+        <p:nvSpPr>
+          <p:cNvPr id="14" name="Text 11"/>
+          <p:cNvSpPr txBox="1"/>
+          <p:nvPr/>
+        </p:nvSpPr>
+        <p:spPr>
+          <a:xfrm>
+            <a:off x="7114032" y="2606040"/>
+            <a:ext cx="4206240" cy="822960"/>
           </a:xfrm>
           <a:prstGeom prst="rect">
             <a:avLst/>
@@ -12322,7 +12071,7 @@
                 <a:ea typeface="Calibri" pitchFamily="34" charset="-122"/>
                 <a:cs typeface="Calibri" pitchFamily="34" charset="-120"/>
               </a:rPr>
-              <a:t>Mass market punishes complexity. Every tier is a support call.</a:t>
+              <a:t>One card purchase a month proves the customer is alive, not that they bank with us. It is nearly costless to satisfy and carries almost no information. Gate the premium on income landing instead.</a:t>
             </a:r>
             <a:endParaRPr lang="en-US" sz="1150" dirty="0"/>
           </a:p>
@@ -12330,13 +12079,13 @@
       </p:sp>
       <p:sp>
         <p:nvSpPr>
-          <p:cNvPr id="11" name="Text 8"/>
-          <p:cNvSpPr txBox="1"/>
-          <p:nvPr/>
-        </p:nvSpPr>
-        <p:spPr>
-          <a:xfrm>
-            <a:off x="7616952" y="3200400"/>
+          <p:cNvPr id="15" name="Text 12"/>
+          <p:cNvSpPr txBox="1"/>
+          <p:nvPr/>
+        </p:nvSpPr>
+        <p:spPr>
+          <a:xfrm>
+            <a:off x="6793992" y="3447288"/>
             <a:ext cx="274320" cy="274320"/>
           </a:xfrm>
           <a:prstGeom prst="rect">
@@ -12369,30 +12118,30 @@
       </p:sp>
       <p:sp>
         <p:nvSpPr>
-          <p:cNvPr id="12" name="Text 9"/>
-          <p:cNvSpPr txBox="1"/>
-          <p:nvPr/>
-        </p:nvSpPr>
-        <p:spPr>
-          <a:xfrm>
-            <a:off x="7936992" y="3182112"/>
-            <a:ext cx="3566160" cy="274320"/>
-          </a:xfrm>
-          <a:prstGeom prst="rect">
-            <a:avLst/>
-          </a:prstGeom>
-          <a:noFill/>
-          <a:ln/>
-        </p:spPr>
-        <p:txBody>
-          <a:bodyPr wrap="square" lIns="0" tIns="0" rIns="0" bIns="0" rtlCol="0" anchor="ctr"/>
-          <a:lstStyle/>
-          <a:p>
-            <a:pPr indent="0" marL="0">
-              <a:buNone/>
-            </a:pPr>
-            <a:r>
-              <a:rPr lang="en-US" sz="1250" b="1" dirty="0">
+          <p:cNvPr id="16" name="Text 13"/>
+          <p:cNvSpPr txBox="1"/>
+          <p:nvPr/>
+        </p:nvSpPr>
+        <p:spPr>
+          <a:xfrm>
+            <a:off x="7114032" y="3429000"/>
+            <a:ext cx="4206240" cy="274320"/>
+          </a:xfrm>
+          <a:prstGeom prst="rect">
+            <a:avLst/>
+          </a:prstGeom>
+          <a:noFill/>
+          <a:ln/>
+        </p:spPr>
+        <p:txBody>
+          <a:bodyPr wrap="square" lIns="0" tIns="0" rIns="0" bIns="0" rtlCol="0" anchor="ctr"/>
+          <a:lstStyle/>
+          <a:p>
+            <a:pPr indent="0" marL="0">
+              <a:buNone/>
+            </a:pPr>
+            <a:r>
+              <a:rPr lang="en-US" sz="1300" b="1" dirty="0">
                 <a:solidFill>
                   <a:srgbClr val="19102A"/>
                 </a:solidFill>
@@ -12400,22 +12149,22 @@
                 <a:ea typeface="Arial" pitchFamily="34" charset="-122"/>
                 <a:cs typeface="Arial" pitchFamily="34" charset="-120"/>
               </a:rPr>
-              <a:t>The premium is a behaviour, not a balance.</a:t>
-            </a:r>
-            <a:endParaRPr lang="en-US" sz="1250" dirty="0"/>
-          </a:p>
-        </p:txBody>
-      </p:sp>
-      <p:sp>
-        <p:nvSpPr>
-          <p:cNvPr id="13" name="Text 10"/>
-          <p:cNvSpPr txBox="1"/>
-          <p:nvPr/>
-        </p:nvSpPr>
-        <p:spPr>
-          <a:xfrm>
-            <a:off x="7936992" y="3456432"/>
-            <a:ext cx="3566160" cy="457200"/>
+              <a:t>Change the cap.</a:t>
+            </a:r>
+            <a:endParaRPr lang="en-US" sz="1300" dirty="0"/>
+          </a:p>
+        </p:txBody>
+      </p:sp>
+      <p:sp>
+        <p:nvSpPr>
+          <p:cNvPr id="17" name="Text 14"/>
+          <p:cNvSpPr txBox="1"/>
+          <p:nvPr/>
+        </p:nvSpPr>
+        <p:spPr>
+          <a:xfrm>
+            <a:off x="7114032" y="3721608"/>
+            <a:ext cx="4206240" cy="822960"/>
           </a:xfrm>
           <a:prstGeom prst="rect">
             <a:avLst/>
@@ -12442,7 +12191,7 @@
                 <a:ea typeface="Calibri" pitchFamily="34" charset="-122"/>
                 <a:cs typeface="Calibri" pitchFamily="34" charset="-120"/>
               </a:rPr>
-              <a:t>We pay up only for money that arrives with data behind it.</a:t>
+              <a:t>A flat MX$25,000 gives every customer an identical yield subsidy regardless of what they bring. Scale the cap with income deposited — roughly one month of it.</a:t>
             </a:r>
             <a:endParaRPr lang="en-US" sz="1150" dirty="0"/>
           </a:p>
@@ -12450,13 +12199,13 @@
       </p:sp>
       <p:sp>
         <p:nvSpPr>
-          <p:cNvPr id="14" name="Text 11"/>
-          <p:cNvSpPr txBox="1"/>
-          <p:nvPr/>
-        </p:nvSpPr>
-        <p:spPr>
-          <a:xfrm>
-            <a:off x="7616952" y="4023360"/>
+          <p:cNvPr id="18" name="Text 15"/>
+          <p:cNvSpPr txBox="1"/>
+          <p:nvPr/>
+        </p:nvSpPr>
+        <p:spPr>
+          <a:xfrm>
+            <a:off x="6793992" y="4562856"/>
             <a:ext cx="274320" cy="274320"/>
           </a:xfrm>
           <a:prstGeom prst="rect">
@@ -12489,30 +12238,30 @@
       </p:sp>
       <p:sp>
         <p:nvSpPr>
-          <p:cNvPr id="15" name="Text 12"/>
-          <p:cNvSpPr txBox="1"/>
-          <p:nvPr/>
-        </p:nvSpPr>
-        <p:spPr>
-          <a:xfrm>
-            <a:off x="7936992" y="4005072"/>
-            <a:ext cx="3566160" cy="274320"/>
-          </a:xfrm>
-          <a:prstGeom prst="rect">
-            <a:avLst/>
-          </a:prstGeom>
-          <a:noFill/>
-          <a:ln/>
-        </p:spPr>
-        <p:txBody>
-          <a:bodyPr wrap="square" lIns="0" tIns="0" rIns="0" bIns="0" rtlCol="0" anchor="ctr"/>
-          <a:lstStyle/>
-          <a:p>
-            <a:pPr indent="0" marL="0">
-              <a:buNone/>
-            </a:pPr>
-            <a:r>
-              <a:rPr lang="en-US" sz="1250" b="1" dirty="0">
+          <p:cNvPr id="19" name="Text 16"/>
+          <p:cNvSpPr txBox="1"/>
+          <p:nvPr/>
+        </p:nvSpPr>
+        <p:spPr>
+          <a:xfrm>
+            <a:off x="7114032" y="4544568"/>
+            <a:ext cx="4206240" cy="274320"/>
+          </a:xfrm>
+          <a:prstGeom prst="rect">
+            <a:avLst/>
+          </a:prstGeom>
+          <a:noFill/>
+          <a:ln/>
+        </p:spPr>
+        <p:txBody>
+          <a:bodyPr wrap="square" lIns="0" tIns="0" rIns="0" bIns="0" rtlCol="0" anchor="ctr"/>
+          <a:lstStyle/>
+          <a:p>
+            <a:pPr indent="0" marL="0">
+              <a:buNone/>
+            </a:pPr>
+            <a:r>
+              <a:rPr lang="en-US" sz="1300" b="1" dirty="0">
                 <a:solidFill>
                   <a:srgbClr val="19102A"/>
                 </a:solidFill>
@@ -12520,22 +12269,22 @@
                 <a:ea typeface="Arial" pitchFamily="34" charset="-122"/>
                 <a:cs typeface="Arial" pitchFamily="34" charset="-120"/>
               </a:rPr>
-              <a:t>Cap the premium balance.</a:t>
-            </a:r>
-            <a:endParaRPr lang="en-US" sz="1250" dirty="0"/>
-          </a:p>
-        </p:txBody>
-      </p:sp>
-      <p:sp>
-        <p:nvSpPr>
-          <p:cNvPr id="16" name="Text 13"/>
-          <p:cNvSpPr txBox="1"/>
-          <p:nvPr/>
-        </p:nvSpPr>
-        <p:spPr>
-          <a:xfrm>
-            <a:off x="7936992" y="4279392"/>
-            <a:ext cx="3566160" cy="457200"/>
+              <a:t>Change the quote.</a:t>
+            </a:r>
+            <a:endParaRPr lang="en-US" sz="1300" dirty="0"/>
+          </a:p>
+        </p:txBody>
+      </p:sp>
+      <p:sp>
+        <p:nvSpPr>
+          <p:cNvPr id="20" name="Text 17"/>
+          <p:cNvSpPr txBox="1"/>
+          <p:nvPr/>
+        </p:nvSpPr>
+        <p:spPr>
+          <a:xfrm>
+            <a:off x="7114032" y="4837176"/>
+            <a:ext cx="4206240" cy="822960"/>
           </a:xfrm>
           <a:prstGeom prst="rect">
             <a:avLst/>
@@ -12562,7 +12311,7 @@
                 <a:ea typeface="Calibri" pitchFamily="34" charset="-122"/>
                 <a:cs typeface="Calibri" pitchFamily="34" charset="-120"/>
               </a:rPr>
-              <a:t>We are buying the relationship, not the treasury balance.</a:t>
+              <a:t>“13% fija” forces us to announce every cut. January’s produced “ganarás menos por tus ahorros” and “pésimas noticias para clientes Nu”. A spread over CETES reprices silently as Banxico moves.</a:t>
             </a:r>
             <a:endParaRPr lang="en-US" sz="1150" dirty="0"/>
           </a:p>
@@ -12570,158 +12319,38 @@
       </p:sp>
       <p:sp>
         <p:nvSpPr>
-          <p:cNvPr id="17" name="Text 14"/>
-          <p:cNvSpPr txBox="1"/>
-          <p:nvPr/>
-        </p:nvSpPr>
-        <p:spPr>
-          <a:xfrm>
-            <a:off x="7616952" y="4846320"/>
-            <a:ext cx="274320" cy="274320"/>
-          </a:xfrm>
-          <a:prstGeom prst="rect">
-            <a:avLst/>
-          </a:prstGeom>
-          <a:noFill/>
-          <a:ln/>
-        </p:spPr>
-        <p:txBody>
-          <a:bodyPr wrap="square" lIns="0" tIns="0" rIns="0" bIns="0" rtlCol="0" anchor="ctr"/>
-          <a:lstStyle/>
-          <a:p>
-            <a:pPr indent="0" marL="0">
-              <a:buNone/>
-            </a:pPr>
-            <a:r>
-              <a:rPr lang="en-US" sz="1300" b="1" dirty="0">
-                <a:solidFill>
-                  <a:srgbClr val="820AD1"/>
-                </a:solidFill>
-                <a:latin typeface="Arial" pitchFamily="34" charset="0"/>
-                <a:ea typeface="Arial" pitchFamily="34" charset="-122"/>
-                <a:cs typeface="Arial" pitchFamily="34" charset="-120"/>
-              </a:rPr>
-              <a:t>4</a:t>
-            </a:r>
-            <a:endParaRPr lang="en-US" sz="1300" dirty="0"/>
-          </a:p>
-        </p:txBody>
-      </p:sp>
-      <p:sp>
-        <p:nvSpPr>
-          <p:cNvPr id="18" name="Text 15"/>
-          <p:cNvSpPr txBox="1"/>
-          <p:nvPr/>
-        </p:nvSpPr>
-        <p:spPr>
-          <a:xfrm>
-            <a:off x="7936992" y="4828032"/>
-            <a:ext cx="3566160" cy="274320"/>
-          </a:xfrm>
-          <a:prstGeom prst="rect">
-            <a:avLst/>
-          </a:prstGeom>
-          <a:noFill/>
-          <a:ln/>
-        </p:spPr>
-        <p:txBody>
-          <a:bodyPr wrap="square" lIns="0" tIns="0" rIns="0" bIns="0" rtlCol="0" anchor="ctr"/>
-          <a:lstStyle/>
-          <a:p>
-            <a:pPr indent="0" marL="0">
-              <a:buNone/>
-            </a:pPr>
-            <a:r>
-              <a:rPr lang="en-US" sz="1250" b="1" dirty="0">
-                <a:solidFill>
-                  <a:srgbClr val="19102A"/>
-                </a:solidFill>
-                <a:latin typeface="Arial" pitchFamily="34" charset="0"/>
-                <a:ea typeface="Arial" pitchFamily="34" charset="-122"/>
-                <a:cs typeface="Arial" pitchFamily="34" charset="-120"/>
-              </a:rPr>
-              <a:t>One tier, two doors.</a:t>
-            </a:r>
-            <a:endParaRPr lang="en-US" sz="1250" dirty="0"/>
-          </a:p>
-        </p:txBody>
-      </p:sp>
-      <p:sp>
-        <p:nvSpPr>
-          <p:cNvPr id="19" name="Text 16"/>
-          <p:cNvSpPr txBox="1"/>
-          <p:nvPr/>
-        </p:nvSpPr>
-        <p:spPr>
-          <a:xfrm>
-            <a:off x="7936992" y="5102352"/>
-            <a:ext cx="3566160" cy="457200"/>
-          </a:xfrm>
-          <a:prstGeom prst="rect">
-            <a:avLst/>
-          </a:prstGeom>
-          <a:noFill/>
-          <a:ln/>
-        </p:spPr>
-        <p:txBody>
-          <a:bodyPr wrap="square" lIns="0" tIns="0" rIns="0" bIns="0" rtlCol="0" anchor="ctr"/>
-          <a:lstStyle/>
-          <a:p>
-            <a:pPr indent="0" marL="0">
-              <a:lnSpc>
-                <a:spcPts val="1500"/>
-              </a:lnSpc>
-              <a:buNone/>
-            </a:pPr>
-            <a:r>
-              <a:rPr lang="en-US" sz="1150" dirty="0">
-                <a:solidFill>
-                  <a:srgbClr val="2F2740"/>
+          <p:cNvPr id="21" name="Text 18"/>
+          <p:cNvSpPr txBox="1"/>
+          <p:nvPr/>
+        </p:nvSpPr>
+        <p:spPr>
+          <a:xfrm>
+            <a:off x="566928" y="6382512"/>
+            <a:ext cx="11057839" cy="274320"/>
+          </a:xfrm>
+          <a:prstGeom prst="rect">
+            <a:avLst/>
+          </a:prstGeom>
+          <a:noFill/>
+          <a:ln/>
+        </p:spPr>
+        <p:txBody>
+          <a:bodyPr wrap="square" lIns="0" tIns="0" rIns="0" bIns="0" rtlCol="0" anchor="ctr"/>
+          <a:lstStyle/>
+          <a:p>
+            <a:pPr indent="0" marL="0">
+              <a:buNone/>
+            </a:pPr>
+            <a:r>
+              <a:rPr lang="en-US" sz="950" i="1" dirty="0">
+                <a:solidFill>
+                  <a:srgbClr val="6E6484"/>
                 </a:solidFill>
                 <a:latin typeface="Calibri" pitchFamily="34" charset="0"/>
                 <a:ea typeface="Calibri" pitchFamily="34" charset="-122"/>
                 <a:cs typeface="Calibri" pitchFamily="34" charset="-120"/>
               </a:rPr>
-              <a:t>Documented and observed income reach identical terms.</a:t>
-            </a:r>
-            <a:endParaRPr lang="en-US" sz="1150" dirty="0"/>
-          </a:p>
-        </p:txBody>
-      </p:sp>
-      <p:sp>
-        <p:nvSpPr>
-          <p:cNvPr id="20" name="Text 17"/>
-          <p:cNvSpPr txBox="1"/>
-          <p:nvPr/>
-        </p:nvSpPr>
-        <p:spPr>
-          <a:xfrm>
-            <a:off x="566928" y="6382512"/>
-            <a:ext cx="11057839" cy="274320"/>
-          </a:xfrm>
-          <a:prstGeom prst="rect">
-            <a:avLst/>
-          </a:prstGeom>
-          <a:noFill/>
-          <a:ln/>
-        </p:spPr>
-        <p:txBody>
-          <a:bodyPr wrap="square" lIns="0" tIns="0" rIns="0" bIns="0" rtlCol="0" anchor="ctr"/>
-          <a:lstStyle/>
-          <a:p>
-            <a:pPr indent="0" marL="0">
-              <a:buNone/>
-            </a:pPr>
-            <a:r>
-              <a:rPr lang="en-US" sz="950" i="1" dirty="0">
-                <a:solidFill>
-                  <a:srgbClr val="6E6484"/>
-                </a:solidFill>
-                <a:latin typeface="Calibri" pitchFamily="34" charset="0"/>
-                <a:ea typeface="Calibri" pitchFamily="34" charset="-122"/>
-                <a:cs typeface="Calibri" pitchFamily="34" charset="-120"/>
-              </a:rPr>
-              <a:t>“One tier, two doors” is the inclusion argument and the fairness argument at once: if the informal tier is not a lower tier, there is no disparate outcome to explain.</a:t>
+              <a:t>One tier, two doors: documented income and observed income must reach identical terms — which is the inclusion argument and the fairness argument at once.</a:t>
             </a:r>
             <a:endParaRPr lang="en-US" sz="950" dirty="0"/>
           </a:p>
@@ -13960,7 +13589,7 @@
                 <a:ea typeface="Calibri" pitchFamily="34" charset="-122"/>
                 <a:cs typeface="Calibri" pitchFamily="34" charset="-120"/>
               </a:rPr>
-              <a:t>“CETES + 4.00%”, not “10.49%”. As Banxico cuts, funding cost falls automatically and there is never a “Nu cut your rate” headline — because we did not.</a:t>
+              <a:t>Today it is “13% fija”, so every cut must be announced — January’s produced “ganarás menos por tus ahorros”. Quoted against CETES, funding cost falls as Banxico moves, with no headline.</a:t>
             </a:r>
             <a:endParaRPr lang="en-US" sz="1150" dirty="0"/>
           </a:p>
@@ -14061,7 +13690,7 @@
                 <a:ea typeface="Arial" pitchFamily="34" charset="-122"/>
                 <a:cs typeface="Arial" pitchFamily="34" charset="-120"/>
               </a:rPr>
-              <a:t>Price the relationship, not the balance.</a:t>
+              <a:t>Fix the gate, not the size of the premium.</a:t>
             </a:r>
             <a:endParaRPr lang="en-US" sz="1350" dirty="0"/>
           </a:p>
@@ -14103,7 +13732,7 @@
                 <a:ea typeface="Calibri" pitchFamily="34" charset="-122"/>
                 <a:cs typeface="Calibri" pitchFamily="34" charset="-120"/>
               </a:rPr>
-              <a:t>The premium requires income landing and is capped. We pay up only for money that brings data and stickiness with it.</a:t>
+              <a:t>Further cuts have diminishing returns and real brand cost. Re-point the 13% at income landing rather than at one card purchase a month, and it buys a relationship instead of a pulse.</a:t>
             </a:r>
             <a:endParaRPr lang="en-US" sz="1150" dirty="0"/>
           </a:p>

--- a/deck/Core_Mexico_Business_Case.pptx
+++ b/deck/Core_Mexico_Business_Case.pptx
@@ -2211,7 +2211,7 @@
           <a:p>
             <a:r>
               <a:rPr lang="en-US" dirty="0"/>
-              <a:t/>
+              <a:t>The third card is the strongest thing in the deck. Do not rush it. Both components already exist in the product — the only missing input is knowledge of payday, which is precisely what income landing provides. It also happens to improve Card’s P&amp;L rather than mine, which is what makes it tradeable.</a:t>
             </a:r>
             <a:endParaRPr lang="en-US" dirty="0"/>
           </a:p>
@@ -3466,7 +3466,7 @@
         <p:spPr>
           <a:xfrm>
             <a:off x="8330184" y="2962656"/>
-            <a:ext cx="3017520" cy="274320"/>
+            <a:ext cx="3063240" cy="274320"/>
           </a:xfrm>
           <a:prstGeom prst="rect">
             <a:avLst/>
@@ -3490,7 +3490,7 @@
                 <a:ea typeface="Arial" pitchFamily="34" charset="-122"/>
                 <a:cs typeface="Arial" pitchFamily="34" charset="-120"/>
               </a:rPr>
-              <a:t>The move nobody else makes</a:t>
+              <a:t>Show the estimate — and the path</a:t>
             </a:r>
             <a:endParaRPr lang="en-US" sz="1400" dirty="0"/>
           </a:p>
@@ -3532,7 +3532,7 @@
                 <a:ea typeface="Calibri" pitchFamily="34" charset="-122"/>
                 <a:cs typeface="Calibri" pitchFamily="34" charset="-120"/>
               </a:rPr>
-              <a:t>Show the customer our income estimate — with the reasoning and an appeal path — before we price them on it.</a:t>
+              <a:t>Show our income estimate back, with the reasoning and an appeal path, before we price anyone on it.</a:t>
             </a:r>
             <a:endParaRPr lang="en-US" sz="1200" dirty="0"/>
           </a:p>
@@ -3561,7 +3561,7 @@
                 <a:ea typeface="Calibri" pitchFamily="34" charset="-122"/>
                 <a:cs typeface="Calibri" pitchFamily="34" charset="-120"/>
               </a:rPr>
-              <a:t>Contestability is what makes automated decisioning defensible, to the customer and to a supervisor.</a:t>
+              <a:t>Then show what raises the line: a counterfactual — the specific, reachable actions that unlock the next level, surfaced before the customer has to ask.</a:t>
             </a:r>
             <a:endParaRPr lang="en-US" sz="1200" dirty="0"/>
           </a:p>
@@ -3600,7 +3600,7 @@
                 <a:ea typeface="Calibri" pitchFamily="34" charset="-122"/>
                 <a:cs typeface="Calibri" pitchFamily="34" charset="-120"/>
               </a:rPr>
-              <a:t>I have built this underwriting spine before, at Tala, for exactly this customer. The appeal path consistently produced better data than any feature we added.</a:t>
+              <a:t>I shipped counterfactual line-progression at Tala México — same market, same thin-file segment — and it lifted retention 10% in the hardest and riskiest segments. Nu buys retention today with a 13% yield; progression buys it more cheaply, and unlike yield it compounds, because the customer who is climbing is the one who is repaying.</a:t>
             </a:r>
             <a:endParaRPr lang="en-US" sz="950" dirty="0"/>
           </a:p>
@@ -3990,7 +3990,7 @@
               <a:buChar char="•"/>
             </a:pPr>
             <a:r>
-              <a:rPr lang="en-US" sz="1150" dirty="0">
+              <a:rPr lang="en-US" sz="1100" dirty="0">
                 <a:solidFill>
                   <a:srgbClr val="D6CCE6"/>
                 </a:solidFill>
@@ -4000,7 +4000,7 @@
               </a:rPr>
               <a:t>Excluded features by policy, not by review</a:t>
             </a:r>
-            <a:endParaRPr lang="en-US" sz="1150" dirty="0"/>
+            <a:endParaRPr lang="en-US" sz="1100" dirty="0"/>
           </a:p>
           <a:p>
             <a:pPr marL="342900" indent="-342900">
@@ -4014,7 +4014,7 @@
               <a:buChar char="•"/>
             </a:pPr>
             <a:r>
-              <a:rPr lang="en-US" sz="1150" dirty="0">
+              <a:rPr lang="en-US" sz="1100" dirty="0">
                 <a:solidFill>
                   <a:srgbClr val="D6CCE6"/>
                 </a:solidFill>
@@ -4024,7 +4024,7 @@
               </a:rPr>
               <a:t>Fairness tested on outcomes — approval, limit and price parity by gender and state</a:t>
             </a:r>
-            <a:endParaRPr lang="en-US" sz="1150" dirty="0"/>
+            <a:endParaRPr lang="en-US" sz="1100" dirty="0"/>
           </a:p>
           <a:p>
             <a:pPr marL="342900" indent="-342900">
@@ -4038,7 +4038,7 @@
               <a:buChar char="•"/>
             </a:pPr>
             <a:r>
-              <a:rPr lang="en-US" sz="1150" dirty="0">
+              <a:rPr lang="en-US" sz="1100" dirty="0">
                 <a:solidFill>
                   <a:srgbClr val="D6CCE6"/>
                 </a:solidFill>
@@ -4048,7 +4048,7 @@
               </a:rPr>
               <a:t>Consent that costs nothing to decline. If declining raises your price, it is not consent</a:t>
             </a:r>
-            <a:endParaRPr lang="en-US" sz="1150" dirty="0"/>
+            <a:endParaRPr lang="en-US" sz="1100" dirty="0"/>
           </a:p>
           <a:p>
             <a:pPr marL="342900" indent="-342900">
@@ -4062,7 +4062,7 @@
               <a:buChar char="•"/>
             </a:pPr>
             <a:r>
-              <a:rPr lang="en-US" sz="1150" dirty="0">
+              <a:rPr lang="en-US" sz="1100" dirty="0">
                 <a:solidFill>
                   <a:srgbClr val="D6CCE6"/>
                 </a:solidFill>
@@ -4070,9 +4070,33 @@
                 <a:ea typeface="Calibri" pitchFamily="34" charset="-122"/>
                 <a:cs typeface="Calibri" pitchFamily="34" charset="-120"/>
               </a:rPr>
+              <a:t>Counterfactual recourse — every capped or declined customer sees what would have to be different, not a reason code</a:t>
+            </a:r>
+            <a:endParaRPr lang="en-US" sz="1100" dirty="0"/>
+          </a:p>
+          <a:p>
+            <a:pPr marL="342900" indent="-342900">
+              <a:lnSpc>
+                <a:spcPts val="1800"/>
+              </a:lnSpc>
+              <a:spcAft>
+                <a:spcPts val="700"/>
+              </a:spcAft>
+              <a:buSzPct val="100000"/>
+              <a:buChar char="•"/>
+            </a:pPr>
+            <a:r>
+              <a:rPr lang="en-US" sz="1100" dirty="0">
+                <a:solidFill>
+                  <a:srgbClr val="D6CCE6"/>
+                </a:solidFill>
+                <a:latin typeface="Calibri" pitchFamily="34" charset="0"/>
+                <a:ea typeface="Calibri" pitchFamily="34" charset="-122"/>
+                <a:cs typeface="Calibri" pitchFamily="34" charset="-120"/>
+              </a:rPr>
               <a:t>Model risk governance under CNBV; reasons explainable to CONDUSEF</a:t>
             </a:r>
-            <a:endParaRPr lang="en-US" sz="1150" dirty="0"/>
+            <a:endParaRPr lang="en-US" sz="1100" dirty="0"/>
           </a:p>
         </p:txBody>
       </p:sp>
@@ -5737,7 +5761,7 @@
                 <a:ea typeface="Calibri" pitchFamily="34" charset="-122"/>
                 <a:cs typeface="Calibri" pitchFamily="34" charset="-120"/>
               </a:rPr>
-              <a:t>I bring Card verified income: better approval rates, higher limits, lower losses. They give me placement. That is a trade with a number on it.</a:t>
+              <a:t>Concretely: payday-aligned autopay. Card has autopay and a selectable due date; what it lacks is knowing when payday is. Income landing supplies it, and the delinquency gain lands on their P&amp;L. They give me placement.</a:t>
             </a:r>
             <a:endParaRPr lang="en-US" sz="1150" dirty="0"/>
           </a:p>
@@ -7172,7 +7196,7 @@
         <p:spPr>
           <a:xfrm>
             <a:off x="841248" y="1965960"/>
-            <a:ext cx="4846320" cy="274320"/>
+            <a:ext cx="4937760" cy="274320"/>
           </a:xfrm>
           <a:prstGeom prst="rect">
             <a:avLst/>
@@ -7196,7 +7220,7 @@
                 <a:ea typeface="Arial" pitchFamily="34" charset="-122"/>
                 <a:cs typeface="Arial" pitchFamily="34" charset="-120"/>
               </a:rPr>
-              <a:t>Assumptions — all of them sliders in the model</a:t>
+              <a:t>Treated as assumptions — including your own numbers</a:t>
             </a:r>
             <a:endParaRPr lang="en-US" sz="1400" dirty="0"/>
           </a:p>
@@ -7211,7 +7235,7 @@
         <p:spPr>
           <a:xfrm>
             <a:off x="841248" y="2359152"/>
-            <a:ext cx="4846320" cy="3108960"/>
+            <a:ext cx="4892040" cy="3108960"/>
           </a:xfrm>
           <a:prstGeom prst="rect">
             <a:avLst/>
@@ -7234,7 +7258,7 @@
               <a:buChar char="•"/>
             </a:pPr>
             <a:r>
-              <a:rPr lang="en-US" sz="1200" dirty="0">
+              <a:rPr lang="en-US" sz="1150" dirty="0">
                 <a:solidFill>
                   <a:srgbClr val="2F2740"/>
                 </a:solidFill>
@@ -7242,9 +7266,9 @@
                 <a:ea typeface="Calibri" pitchFamily="34" charset="-122"/>
                 <a:cs typeface="Calibri" pitchFamily="34" charset="-120"/>
               </a:rPr>
-              <a:t>25% net credit yield after expected losses</a:t>
-            </a:r>
-            <a:endParaRPr lang="en-US" sz="1200" dirty="0"/>
+              <a:t>Your figures, read from public sources: 35% LDR and US$5.7B deposits (Q2 2026 release); the published rate card; Nu+ point value. I have treated all of these as assumptions rather than facts</a:t>
+            </a:r>
+            <a:endParaRPr lang="en-US" sz="1150" dirty="0"/>
           </a:p>
           <a:p>
             <a:pPr marL="342900" indent="-342900">
@@ -7258,7 +7282,7 @@
               <a:buChar char="•"/>
             </a:pPr>
             <a:r>
-              <a:rPr lang="en-US" sz="1200" dirty="0">
+              <a:rPr lang="en-US" sz="1150" dirty="0">
                 <a:solidFill>
                   <a:srgbClr val="2F2740"/>
                 </a:solidFill>
@@ -7266,9 +7290,9 @@
                 <a:ea typeface="Calibri" pitchFamily="34" charset="-122"/>
                 <a:cs typeface="Calibri" pitchFamily="34" charset="-120"/>
               </a:rPr>
-              <a:t>28% LDR floor with no income signal; 70% ceiling with it</a:t>
-            </a:r>
-            <a:endParaRPr lang="en-US" sz="1200" dirty="0"/>
+              <a:t>Mine: 25% net credit yield after expected losses</a:t>
+            </a:r>
+            <a:endParaRPr lang="en-US" sz="1150" dirty="0"/>
           </a:p>
           <a:p>
             <a:pPr marL="342900" indent="-342900">
@@ -7282,7 +7306,7 @@
               <a:buChar char="•"/>
             </a:pPr>
             <a:r>
-              <a:rPr lang="en-US" sz="1200" dirty="0">
+              <a:rPr lang="en-US" sz="1150" dirty="0">
                 <a:solidFill>
                   <a:srgbClr val="2F2740"/>
                 </a:solidFill>
@@ -7290,9 +7314,9 @@
                 <a:ea typeface="Calibri" pitchFamily="34" charset="-122"/>
                 <a:cs typeface="Calibri" pitchFamily="34" charset="-120"/>
               </a:rPr>
-              <a:t>45% income-landing attach reaches that ceiling</a:t>
-            </a:r>
-            <a:endParaRPr lang="en-US" sz="1200" dirty="0"/>
+              <a:t>Mine: 28% LDR floor with no income signal, 70% ceiling with it, reached at 45% attach</a:t>
+            </a:r>
+            <a:endParaRPr lang="en-US" sz="1150" dirty="0"/>
           </a:p>
           <a:p>
             <a:pPr marL="342900" indent="-342900">
@@ -7306,7 +7330,7 @@
               <a:buChar char="•"/>
             </a:pPr>
             <a:r>
-              <a:rPr lang="en-US" sz="1200" dirty="0">
+              <a:rPr lang="en-US" sz="1150" dirty="0">
                 <a:solidFill>
                   <a:srgbClr val="2F2740"/>
                 </a:solidFill>
@@ -7314,9 +7338,9 @@
                 <a:ea typeface="Calibri" pitchFamily="34" charset="-122"/>
                 <a:cs typeface="Calibri" pitchFamily="34" charset="-120"/>
               </a:rPr>
-              <a:t>8% income landing today (calibration check: this yields 35.5% LDR against the 35% reported)</a:t>
-            </a:r>
-            <a:endParaRPr lang="en-US" sz="1200" dirty="0"/>
+              <a:t>Mine: 8% income landing today — this calibrates to a 35.5% LDR against the 35% reported</a:t>
+            </a:r>
+            <a:endParaRPr lang="en-US" sz="1150" dirty="0"/>
           </a:p>
           <a:p>
             <a:pPr marL="342900" indent="-342900">
@@ -7330,7 +7354,7 @@
               <a:buChar char="•"/>
             </a:pPr>
             <a:r>
-              <a:rPr lang="en-US" sz="1200" dirty="0">
+              <a:rPr lang="en-US" sz="1150" dirty="0">
                 <a:solidFill>
                   <a:srgbClr val="2F2740"/>
                 </a:solidFill>
@@ -7338,33 +7362,9 @@
                 <a:ea typeface="Calibri" pitchFamily="34" charset="-122"/>
                 <a:cs typeface="Calibri" pitchFamily="34" charset="-120"/>
               </a:rPr>
-              <a:t>Headline yield paid on all balances — deliberately conservative</a:t>
-            </a:r>
-            <a:endParaRPr lang="en-US" sz="1200" dirty="0"/>
-          </a:p>
-          <a:p>
-            <a:pPr marL="342900" indent="-342900">
-              <a:lnSpc>
-                <a:spcPts val="1800"/>
-              </a:lnSpc>
-              <a:spcAft>
-                <a:spcPts val="700"/>
-              </a:spcAft>
-              <a:buSzPct val="100000"/>
-              <a:buChar char="•"/>
-            </a:pPr>
-            <a:r>
-              <a:rPr lang="en-US" sz="1200" dirty="0">
-                <a:solidFill>
-                  <a:srgbClr val="2F2740"/>
-                </a:solidFill>
-                <a:latin typeface="Calibri" pitchFamily="34" charset="0"/>
-                <a:ea typeface="Calibri" pitchFamily="34" charset="-122"/>
-                <a:cs typeface="Calibri" pitchFamily="34" charset="-120"/>
-              </a:rPr>
-              <a:t>Balance sensitivity constant. It is not — it rises once a licensed competitor advertises against us</a:t>
-            </a:r>
-            <a:endParaRPr lang="en-US" sz="1200" dirty="0"/>
+              <a:t>Mine: balance sensitivity constant. It is not — it rises once a licensed competitor advertises against us</a:t>
+            </a:r>
+            <a:endParaRPr lang="en-US" sz="1150" dirty="0"/>
           </a:p>
         </p:txBody>
       </p:sp>
@@ -8324,6 +8324,49 @@
                 <a:ea typeface="Calibri" pitchFamily="34" charset="-122"/>
                 <a:cs typeface="Calibri" pitchFamily="34" charset="-120"/>
               </a:rPr>
+              <a:t>Nu México product pages, Sept 2026 — </a:t>
+            </a:r>
+            <a:pPr indent="0" marL="0">
+              <a:lnSpc>
+                <a:spcPts val="1900"/>
+              </a:lnSpc>
+              <a:spcAft>
+                <a:spcPts val="600"/>
+              </a:spcAft>
+              <a:buNone/>
+            </a:pPr>
+            <a:r>
+              <a:rPr lang="en-US" sz="1200" dirty="0">
+                <a:solidFill>
+                  <a:srgbClr val="2F2740"/>
+                </a:solidFill>
+                <a:latin typeface="Calibri" pitchFamily="34" charset="0"/>
+                <a:ea typeface="Calibri" pitchFamily="34" charset="-122"/>
+                <a:cs typeface="Calibri" pitchFamily="34" charset="-120"/>
+              </a:rPr>
+              <a:t>published rate card (Cajita 24/7 6.50%, Cajita Turbo 13.00% capped MX$25,000 on one card purchase a month, Ahorro Congelado 6.55–6.80%); credit-card automatic payment, funded from the Nu debit account, on a customer-selected cut-off or due date; Nu+ rewards, 3% in points at MX$0.10 a point on a MX$33.34 minimum, redeemable into a Cajita.</a:t>
+            </a:r>
+            <a:endParaRPr lang="en-US" sz="1200" dirty="0"/>
+          </a:p>
+          <a:p>
+            <a:pPr indent="0" marL="0">
+              <a:lnSpc>
+                <a:spcPts val="1900"/>
+              </a:lnSpc>
+              <a:spcAft>
+                <a:spcPts val="600"/>
+              </a:spcAft>
+              <a:buNone/>
+            </a:pPr>
+            <a:r>
+              <a:rPr lang="en-US" sz="1200" b="1" dirty="0">
+                <a:solidFill>
+                  <a:srgbClr val="2F2740"/>
+                </a:solidFill>
+                <a:latin typeface="Calibri" pitchFamily="34" charset="0"/>
+                <a:ea typeface="Calibri" pitchFamily="34" charset="-122"/>
+                <a:cs typeface="Calibri" pitchFamily="34" charset="-120"/>
+              </a:rPr>
               <a:t>Competitive — </a:t>
             </a:r>
             <a:pPr indent="0" marL="0">
@@ -9919,7 +9962,7 @@
                 <a:ea typeface="Calibri" pitchFamily="34" charset="-122"/>
                 <a:cs typeface="Calibri" pitchFamily="34" charset="-120"/>
               </a:rPr>
-              <a:t>Q2 2026 results. Net credit yield of 25% is my assumption, not company data — it is a slider in the model and the conclusion holds from 15% to 35%.</a:t>
+              <a:t>Every Nu figure in this deck is my read of a public source, treated as an assumption and cited in the appendix — you have the real ones, so please correct any of them. Sources here: Q2 2026 results release, 13 Aug 2026. The 25% net credit yield is mine, and is a slider in the model.</a:t>
             </a:r>
             <a:endParaRPr lang="en-US" sz="950" dirty="0"/>
           </a:p>
@@ -12350,7 +12393,7 @@
                 <a:ea typeface="Calibri" pitchFamily="34" charset="-122"/>
                 <a:cs typeface="Calibri" pitchFamily="34" charset="-120"/>
               </a:rPr>
-              <a:t>One tier, two doors: documented income and observed income must reach identical terms — which is the inclusion argument and the fairness argument at once.</a:t>
+              <a:t>Rates as published by Nu México, calculated 10 Aug 2026, in force to 7 Oct 2026 — read from public pages, so treat as my assumption. One tier, two doors: documented and observed income must reach identical terms.</a:t>
             </a:r>
             <a:endParaRPr lang="en-US" sz="950" dirty="0"/>
           </a:p>
@@ -15187,7 +15230,7 @@
                 <a:ea typeface="Arial" pitchFamily="34" charset="-122"/>
                 <a:cs typeface="Arial" pitchFamily="34" charset="-120"/>
               </a:rPr>
-              <a:t>Trae tu nómina — the wedge only a licensed bank has</a:t>
+              <a:t>Trae tu nómina — the missing input</a:t>
             </a:r>
             <a:endParaRPr lang="en-US" sz="3100" dirty="0"/>
           </a:p>
@@ -15201,7 +15244,7 @@
         </p:nvSpPr>
         <p:spPr>
           <a:xfrm>
-            <a:off x="566928" y="1783080"/>
+            <a:off x="566928" y="1719072"/>
             <a:ext cx="2468880" cy="566928"/>
           </a:xfrm>
           <a:prstGeom prst="rect">
@@ -15240,7 +15283,7 @@
         </p:nvSpPr>
         <p:spPr>
           <a:xfrm>
-            <a:off x="566928" y="2350008"/>
+            <a:off x="566928" y="2286000"/>
             <a:ext cx="2468880" cy="237744"/>
           </a:xfrm>
           <a:prstGeom prst="rect">
@@ -15279,7 +15322,7 @@
         </p:nvSpPr>
         <p:spPr>
           <a:xfrm>
-            <a:off x="566928" y="2587752"/>
+            <a:off x="566928" y="2523744"/>
             <a:ext cx="2468880" cy="457200"/>
           </a:xfrm>
           <a:prstGeom prst="rect">
@@ -15318,7 +15361,7 @@
         </p:nvSpPr>
         <p:spPr>
           <a:xfrm>
-            <a:off x="3355848" y="1783080"/>
+            <a:off x="3355848" y="1719072"/>
             <a:ext cx="2468880" cy="566928"/>
           </a:xfrm>
           <a:prstGeom prst="rect">
@@ -15357,7 +15400,7 @@
         </p:nvSpPr>
         <p:spPr>
           <a:xfrm>
-            <a:off x="3355848" y="2350008"/>
+            <a:off x="3355848" y="2286000"/>
             <a:ext cx="2468880" cy="237744"/>
           </a:xfrm>
           <a:prstGeom prst="rect">
@@ -15396,7 +15439,7 @@
         </p:nvSpPr>
         <p:spPr>
           <a:xfrm>
-            <a:off x="3355848" y="2587752"/>
+            <a:off x="3355848" y="2523744"/>
             <a:ext cx="2468880" cy="457200"/>
           </a:xfrm>
           <a:prstGeom prst="rect">
@@ -15435,7 +15478,7 @@
         </p:nvSpPr>
         <p:spPr>
           <a:xfrm>
-            <a:off x="6144768" y="1783080"/>
+            <a:off x="6144768" y="1719072"/>
             <a:ext cx="2468880" cy="566928"/>
           </a:xfrm>
           <a:prstGeom prst="rect">
@@ -15474,7 +15517,7 @@
         </p:nvSpPr>
         <p:spPr>
           <a:xfrm>
-            <a:off x="6144768" y="2350008"/>
+            <a:off x="6144768" y="2286000"/>
             <a:ext cx="2468880" cy="237744"/>
           </a:xfrm>
           <a:prstGeom prst="rect">
@@ -15513,7 +15556,7 @@
         </p:nvSpPr>
         <p:spPr>
           <a:xfrm>
-            <a:off x="6144768" y="2587752"/>
+            <a:off x="6144768" y="2523744"/>
             <a:ext cx="2468880" cy="457200"/>
           </a:xfrm>
           <a:prstGeom prst="rect">
@@ -15552,7 +15595,7 @@
         </p:nvSpPr>
         <p:spPr>
           <a:xfrm>
-            <a:off x="8933688" y="1783080"/>
+            <a:off x="8933688" y="1719072"/>
             <a:ext cx="2651760" cy="566928"/>
           </a:xfrm>
           <a:prstGeom prst="rect">
@@ -15591,7 +15634,7 @@
         </p:nvSpPr>
         <p:spPr>
           <a:xfrm>
-            <a:off x="8933688" y="2350008"/>
+            <a:off x="8933688" y="2286000"/>
             <a:ext cx="2651760" cy="237744"/>
           </a:xfrm>
           <a:prstGeom prst="rect">
@@ -15630,7 +15673,7 @@
         </p:nvSpPr>
         <p:spPr>
           <a:xfrm>
-            <a:off x="8933688" y="2587752"/>
+            <a:off x="8933688" y="2523744"/>
             <a:ext cx="2651760" cy="457200"/>
           </a:xfrm>
           <a:prstGeom prst="rect">
@@ -15669,12 +15712,12 @@
         </p:nvSpPr>
         <p:spPr>
           <a:xfrm>
-            <a:off x="566928" y="3310128"/>
-            <a:ext cx="5669280" cy="2286000"/>
+            <a:off x="566928" y="3200400"/>
+            <a:ext cx="3566160" cy="2542032"/>
           </a:xfrm>
           <a:prstGeom prst="roundRect">
             <a:avLst>
-              <a:gd name="adj" fmla="val 2400"/>
+              <a:gd name="adj" fmla="val 2158"/>
             </a:avLst>
           </a:prstGeom>
           <a:solidFill>
@@ -15696,24 +15739,24 @@
         </p:nvSpPr>
         <p:spPr>
           <a:xfrm>
-            <a:off x="841248" y="3493008"/>
-            <a:ext cx="5029200" cy="274320"/>
-          </a:xfrm>
-          <a:prstGeom prst="rect">
-            <a:avLst/>
-          </a:prstGeom>
-          <a:noFill/>
-          <a:ln/>
-        </p:spPr>
-        <p:txBody>
-          <a:bodyPr wrap="square" lIns="0" tIns="0" rIns="0" bIns="0" rtlCol="0" anchor="ctr"/>
-          <a:lstStyle/>
-          <a:p>
-            <a:pPr indent="0" marL="0">
-              <a:buNone/>
-            </a:pPr>
-            <a:r>
-              <a:rPr lang="en-US" sz="1500" b="1" dirty="0">
+            <a:off x="822960" y="3383280"/>
+            <a:ext cx="3108960" cy="310896"/>
+          </a:xfrm>
+          <a:prstGeom prst="rect">
+            <a:avLst/>
+          </a:prstGeom>
+          <a:noFill/>
+          <a:ln/>
+        </p:spPr>
+        <p:txBody>
+          <a:bodyPr wrap="square" lIns="0" tIns="0" rIns="0" bIns="0" rtlCol="0" anchor="ctr"/>
+          <a:lstStyle/>
+          <a:p>
+            <a:pPr indent="0" marL="0">
+              <a:buNone/>
+            </a:pPr>
+            <a:r>
+              <a:rPr lang="en-US" sz="1450" b="1" dirty="0">
                 <a:solidFill>
                   <a:srgbClr val="820AD1"/>
                 </a:solidFill>
@@ -15723,7 +15766,7 @@
               </a:rPr>
               <a:t>The wedge</a:t>
             </a:r>
-            <a:endParaRPr lang="en-US" sz="1500" dirty="0"/>
+            <a:endParaRPr lang="en-US" sz="1450" dirty="0"/>
           </a:p>
         </p:txBody>
       </p:sp>
@@ -15735,27 +15778,27 @@
         </p:nvSpPr>
         <p:spPr>
           <a:xfrm>
-            <a:off x="841248" y="3822192"/>
-            <a:ext cx="5120640" cy="1645920"/>
-          </a:xfrm>
-          <a:prstGeom prst="rect">
-            <a:avLst/>
-          </a:prstGeom>
-          <a:noFill/>
-          <a:ln/>
-        </p:spPr>
-        <p:txBody>
-          <a:bodyPr wrap="square" lIns="0" tIns="0" rIns="0" bIns="0" rtlCol="0" anchor="ctr"/>
-          <a:lstStyle/>
-          <a:p>
-            <a:pPr indent="0" marL="0">
-              <a:lnSpc>
-                <a:spcPts val="1800"/>
-              </a:lnSpc>
-              <a:buNone/>
-            </a:pPr>
-            <a:r>
-              <a:rPr lang="en-US" sz="1300" dirty="0">
+            <a:off x="822960" y="3749040"/>
+            <a:ext cx="3108960" cy="1828800"/>
+          </a:xfrm>
+          <a:prstGeom prst="rect">
+            <a:avLst/>
+          </a:prstGeom>
+          <a:noFill/>
+          <a:ln/>
+        </p:spPr>
+        <p:txBody>
+          <a:bodyPr wrap="square" lIns="0" tIns="0" rIns="0" bIns="0" rtlCol="0" anchor="ctr"/>
+          <a:lstStyle/>
+          <a:p>
+            <a:pPr indent="0" marL="0">
+              <a:lnSpc>
+                <a:spcPts val="1550"/>
+              </a:lnSpc>
+              <a:buNone/>
+            </a:pPr>
+            <a:r>
+              <a:rPr lang="en-US" sz="1150" dirty="0">
                 <a:solidFill>
                   <a:srgbClr val="2F2740"/>
                 </a:solidFill>
@@ -15763,28 +15806,28 @@
                 <a:ea typeface="Calibri" pitchFamily="34" charset="-122"/>
                 <a:cs typeface="Calibri" pitchFamily="34" charset="-120"/>
               </a:rPr>
-              <a:t>Portabilidad de nómina is the worker’s legal right. Banks cannot charge for it and cannot refuse it. No employer sale is required.</a:t>
-            </a:r>
-            <a:endParaRPr lang="en-US" sz="1300" dirty="0"/>
-          </a:p>
-          <a:p>
-            <a:pPr indent="0" marL="0">
-              <a:lnSpc>
-                <a:spcPts val="1800"/>
-              </a:lnSpc>
-              <a:buNone/>
-            </a:pPr>
-            <a:endParaRPr lang="en-US" sz="1300" dirty="0"/>
-          </a:p>
-          <a:p>
-            <a:pPr indent="0" marL="0">
-              <a:lnSpc>
-                <a:spcPts val="1800"/>
-              </a:lnSpc>
-              <a:buNone/>
-            </a:pPr>
-            <a:r>
-              <a:rPr lang="en-US" sz="1300" dirty="0">
+              <a:t>Portabilidad de nómina is the worker’s legal right. Banks cannot charge for it and cannot refuse. No employer sale required.</a:t>
+            </a:r>
+            <a:endParaRPr lang="en-US" sz="1150" dirty="0"/>
+          </a:p>
+          <a:p>
+            <a:pPr indent="0" marL="0">
+              <a:lnSpc>
+                <a:spcPts val="1550"/>
+              </a:lnSpc>
+              <a:buNone/>
+            </a:pPr>
+            <a:endParaRPr lang="en-US" sz="1150" dirty="0"/>
+          </a:p>
+          <a:p>
+            <a:pPr indent="0" marL="0">
+              <a:lnSpc>
+                <a:spcPts val="1550"/>
+              </a:lnSpc>
+              <a:buNone/>
+            </a:pPr>
+            <a:r>
+              <a:rPr lang="en-US" sz="1150" dirty="0">
                 <a:solidFill>
                   <a:srgbClr val="2F2740"/>
                 </a:solidFill>
@@ -15794,7 +15837,7 @@
               </a:rPr>
               <a:t>The incumbent moat is a corporate contract signed years ago. Portability makes it irrelevant — the decision belongs to the worker.</a:t>
             </a:r>
-            <a:endParaRPr lang="en-US" sz="1300" dirty="0"/>
+            <a:endParaRPr lang="en-US" sz="1150" dirty="0"/>
           </a:p>
         </p:txBody>
       </p:sp>
@@ -15806,12 +15849,12 @@
         </p:nvSpPr>
         <p:spPr>
           <a:xfrm>
-            <a:off x="6492240" y="3310128"/>
-            <a:ext cx="5148072" cy="2286000"/>
+            <a:off x="4315968" y="3200400"/>
+            <a:ext cx="3566160" cy="2542032"/>
           </a:xfrm>
           <a:prstGeom prst="roundRect">
             <a:avLst>
-              <a:gd name="adj" fmla="val 2400"/>
+              <a:gd name="adj" fmla="val 2158"/>
             </a:avLst>
           </a:prstGeom>
           <a:solidFill>
@@ -15833,24 +15876,24 @@
         </p:nvSpPr>
         <p:spPr>
           <a:xfrm>
-            <a:off x="6748272" y="3493008"/>
-            <a:ext cx="4663440" cy="274320"/>
-          </a:xfrm>
-          <a:prstGeom prst="rect">
-            <a:avLst/>
-          </a:prstGeom>
-          <a:noFill/>
-          <a:ln/>
-        </p:spPr>
-        <p:txBody>
-          <a:bodyPr wrap="square" lIns="0" tIns="0" rIns="0" bIns="0" rtlCol="0" anchor="ctr"/>
-          <a:lstStyle/>
-          <a:p>
-            <a:pPr indent="0" marL="0">
-              <a:buNone/>
-            </a:pPr>
-            <a:r>
-              <a:rPr lang="en-US" sz="1500" b="1" dirty="0">
+            <a:off x="4572000" y="3383280"/>
+            <a:ext cx="3108960" cy="310896"/>
+          </a:xfrm>
+          <a:prstGeom prst="rect">
+            <a:avLst/>
+          </a:prstGeom>
+          <a:noFill/>
+          <a:ln/>
+        </p:spPr>
+        <p:txBody>
+          <a:bodyPr wrap="square" lIns="0" tIns="0" rIns="0" bIns="0" rtlCol="0" anchor="ctr"/>
+          <a:lstStyle/>
+          <a:p>
+            <a:pPr indent="0" marL="0">
+              <a:buNone/>
+            </a:pPr>
+            <a:r>
+              <a:rPr lang="en-US" sz="1450" b="1" dirty="0">
                 <a:solidFill>
                   <a:srgbClr val="19102A"/>
                 </a:solidFill>
@@ -15858,9 +15901,9 @@
                 <a:ea typeface="Arial" pitchFamily="34" charset="-122"/>
                 <a:cs typeface="Arial" pitchFamily="34" charset="-120"/>
               </a:rPr>
-              <a:t>Three things I would hold the team to</a:t>
-            </a:r>
-            <a:endParaRPr lang="en-US" sz="1500" dirty="0"/>
+              <a:t>The loop is already built</a:t>
+            </a:r>
+            <a:endParaRPr lang="en-US" sz="1450" dirty="0"/>
           </a:p>
         </p:txBody>
       </p:sp>
@@ -15872,31 +15915,27 @@
         </p:nvSpPr>
         <p:spPr>
           <a:xfrm>
-            <a:off x="6748272" y="3840480"/>
-            <a:ext cx="4663440" cy="1645920"/>
-          </a:xfrm>
-          <a:prstGeom prst="rect">
-            <a:avLst/>
-          </a:prstGeom>
-          <a:noFill/>
-          <a:ln/>
-        </p:spPr>
-        <p:txBody>
-          <a:bodyPr wrap="square" lIns="0" tIns="0" rIns="0" bIns="0" rtlCol="0" anchor="ctr"/>
-          <a:lstStyle/>
-          <a:p>
-            <a:pPr marL="342900" indent="-342900">
-              <a:lnSpc>
-                <a:spcPts val="1800"/>
-              </a:lnSpc>
-              <a:spcAft>
-                <a:spcPts val="700"/>
-              </a:spcAft>
-              <a:buSzPct val="100000"/>
-              <a:buChar char="•"/>
-            </a:pPr>
-            <a:r>
-              <a:rPr lang="en-US" sz="1250" dirty="0">
+            <a:off x="4572000" y="3749040"/>
+            <a:ext cx="3108960" cy="1828800"/>
+          </a:xfrm>
+          <a:prstGeom prst="rect">
+            <a:avLst/>
+          </a:prstGeom>
+          <a:noFill/>
+          <a:ln/>
+        </p:spPr>
+        <p:txBody>
+          <a:bodyPr wrap="square" lIns="0" tIns="0" rIns="0" bIns="0" rtlCol="0" anchor="ctr"/>
+          <a:lstStyle/>
+          <a:p>
+            <a:pPr indent="0" marL="0">
+              <a:lnSpc>
+                <a:spcPts val="1550"/>
+              </a:lnSpc>
+              <a:buNone/>
+            </a:pPr>
+            <a:r>
+              <a:rPr lang="en-US" sz="1150" dirty="0">
                 <a:solidFill>
                   <a:srgbClr val="2F2740"/>
                 </a:solidFill>
@@ -15904,23 +15943,28 @@
                 <a:ea typeface="Calibri" pitchFamily="34" charset="-122"/>
                 <a:cs typeface="Calibri" pitchFamily="34" charset="-120"/>
               </a:rPr>
-              <a:t>Sell the credit line, not the rate — the rate attracts the deposits we least want</a:t>
-            </a:r>
-            <a:endParaRPr lang="en-US" sz="1250" dirty="0"/>
-          </a:p>
-          <a:p>
-            <a:pPr marL="342900" indent="-342900">
-              <a:lnSpc>
-                <a:spcPts val="1800"/>
-              </a:lnSpc>
-              <a:spcAft>
-                <a:spcPts val="700"/>
-              </a:spcAft>
-              <a:buSzPct val="100000"/>
-              <a:buChar char="•"/>
-            </a:pPr>
-            <a:r>
-              <a:rPr lang="en-US" sz="1250" dirty="0">
+              <a:t>Autopay already debits the Nu account. The Turbo yield gate already requires monthly card activity. Nu+ points already route back into a Cajita. Customers already choose their own payment due date.</a:t>
+            </a:r>
+            <a:endParaRPr lang="en-US" sz="1150" dirty="0"/>
+          </a:p>
+          <a:p>
+            <a:pPr indent="0" marL="0">
+              <a:lnSpc>
+                <a:spcPts val="1550"/>
+              </a:lnSpc>
+              <a:buNone/>
+            </a:pPr>
+            <a:endParaRPr lang="en-US" sz="1150" dirty="0"/>
+          </a:p>
+          <a:p>
+            <a:pPr indent="0" marL="0">
+              <a:lnSpc>
+                <a:spcPts val="1550"/>
+              </a:lnSpc>
+              <a:buNone/>
+            </a:pPr>
+            <a:r>
+              <a:rPr lang="en-US" sz="1150" dirty="0">
                 <a:solidFill>
                   <a:srgbClr val="2F2740"/>
                 </a:solidFill>
@@ -15928,23 +15972,107 @@
                 <a:ea typeface="Calibri" pitchFamily="34" charset="-122"/>
                 <a:cs typeface="Calibri" pitchFamily="34" charset="-120"/>
               </a:rPr>
-              <a:t>Measure completed first salary landings, never requests</a:t>
-            </a:r>
-            <a:endParaRPr lang="en-US" sz="1250" dirty="0"/>
-          </a:p>
-          <a:p>
-            <a:pPr marL="342900" indent="-342900">
-              <a:lnSpc>
-                <a:spcPts val="1800"/>
-              </a:lnSpc>
-              <a:spcAft>
-                <a:spcPts val="700"/>
-              </a:spcAft>
-              <a:buSzPct val="100000"/>
-              <a:buChar char="•"/>
-            </a:pPr>
-            <a:r>
-              <a:rPr lang="en-US" sz="1250" dirty="0">
+              <a:t>Nómina is not a new business line. It is the missing input to a machine that is already running.</a:t>
+            </a:r>
+            <a:endParaRPr lang="en-US" sz="1150" dirty="0"/>
+          </a:p>
+        </p:txBody>
+      </p:sp>
+      <p:sp>
+        <p:nvSpPr>
+          <p:cNvPr id="23" name="Shape 21"/>
+          <p:cNvSpPr/>
+          <p:nvPr/>
+        </p:nvSpPr>
+        <p:spPr>
+          <a:xfrm>
+            <a:off x="8065008" y="3200400"/>
+            <a:ext cx="3566160" cy="2542032"/>
+          </a:xfrm>
+          <a:prstGeom prst="roundRect">
+            <a:avLst>
+              <a:gd name="adj" fmla="val 2158"/>
+            </a:avLst>
+          </a:prstGeom>
+          <a:solidFill>
+            <a:srgbClr val="FAF8FD"/>
+          </a:solidFill>
+          <a:ln w="12700">
+            <a:solidFill>
+              <a:srgbClr val="E2DCEC"/>
+            </a:solidFill>
+            <a:prstDash val="solid"/>
+          </a:ln>
+        </p:spPr>
+      </p:sp>
+      <p:sp>
+        <p:nvSpPr>
+          <p:cNvPr id="24" name="Text 22"/>
+          <p:cNvSpPr txBox="1"/>
+          <p:nvPr/>
+        </p:nvSpPr>
+        <p:spPr>
+          <a:xfrm>
+            <a:off x="8321040" y="3383280"/>
+            <a:ext cx="3108960" cy="310896"/>
+          </a:xfrm>
+          <a:prstGeom prst="rect">
+            <a:avLst/>
+          </a:prstGeom>
+          <a:noFill/>
+          <a:ln/>
+        </p:spPr>
+        <p:txBody>
+          <a:bodyPr wrap="square" lIns="0" tIns="0" rIns="0" bIns="0" rtlCol="0" anchor="ctr"/>
+          <a:lstStyle/>
+          <a:p>
+            <a:pPr indent="0" marL="0">
+              <a:buNone/>
+            </a:pPr>
+            <a:r>
+              <a:rPr lang="en-US" sz="1450" b="1" dirty="0">
+                <a:solidFill>
+                  <a:srgbClr val="19102A"/>
+                </a:solidFill>
+                <a:latin typeface="Arial" pitchFamily="34" charset="0"/>
+                <a:ea typeface="Arial" pitchFamily="34" charset="-122"/>
+                <a:cs typeface="Arial" pitchFamily="34" charset="-120"/>
+              </a:rPr>
+              <a:t>Payday-aligned autopay</a:t>
+            </a:r>
+            <a:endParaRPr lang="en-US" sz="1450" dirty="0"/>
+          </a:p>
+        </p:txBody>
+      </p:sp>
+      <p:sp>
+        <p:nvSpPr>
+          <p:cNvPr id="25" name="Text 23"/>
+          <p:cNvSpPr txBox="1"/>
+          <p:nvPr/>
+        </p:nvSpPr>
+        <p:spPr>
+          <a:xfrm>
+            <a:off x="8321040" y="3749040"/>
+            <a:ext cx="3108960" cy="1828800"/>
+          </a:xfrm>
+          <a:prstGeom prst="rect">
+            <a:avLst/>
+          </a:prstGeom>
+          <a:noFill/>
+          <a:ln/>
+        </p:spPr>
+        <p:txBody>
+          <a:bodyPr wrap="square" lIns="0" tIns="0" rIns="0" bIns="0" rtlCol="0" anchor="ctr"/>
+          <a:lstStyle/>
+          <a:p>
+            <a:pPr indent="0" marL="0">
+              <a:lnSpc>
+                <a:spcPts val="1550"/>
+              </a:lnSpc>
+              <a:buNone/>
+            </a:pPr>
+            <a:r>
+              <a:rPr lang="en-US" sz="1150" dirty="0">
                 <a:solidFill>
                   <a:srgbClr val="2F2740"/>
                 </a:solidFill>
@@ -15952,46 +16080,75 @@
                 <a:ea typeface="Calibri" pitchFamily="34" charset="-122"/>
                 <a:cs typeface="Calibri" pitchFamily="34" charset="-120"/>
               </a:rPr>
-              <a:t>The 11-day gap is where the funnel leaks: naming a date is the retention mechanic, not polish</a:t>
-            </a:r>
-            <a:endParaRPr lang="en-US" sz="1250" dirty="0"/>
-          </a:p>
-        </p:txBody>
-      </p:sp>
-      <p:sp>
-        <p:nvSpPr>
-          <p:cNvPr id="23" name="Text 21"/>
-          <p:cNvSpPr txBox="1"/>
-          <p:nvPr/>
-        </p:nvSpPr>
-        <p:spPr>
-          <a:xfrm>
-            <a:off x="566928" y="6382512"/>
-            <a:ext cx="11057839" cy="274320"/>
-          </a:xfrm>
-          <a:prstGeom prst="rect">
-            <a:avLst/>
-          </a:prstGeom>
-          <a:noFill/>
-          <a:ln/>
-        </p:spPr>
-        <p:txBody>
-          <a:bodyPr wrap="square" lIns="0" tIns="0" rIns="0" bIns="0" rtlCol="0" anchor="ctr"/>
-          <a:lstStyle/>
-          <a:p>
-            <a:pPr indent="0" marL="0">
-              <a:buNone/>
-            </a:pPr>
-            <a:r>
-              <a:rPr lang="en-US" sz="950" i="1" dirty="0">
-                <a:solidFill>
-                  <a:srgbClr val="6E6484"/>
+              <a:t>We have autopay. We have a selectable due date. What we do not have is knowing when payday is — income landing supplies exactly that.</a:t>
+            </a:r>
+            <a:endParaRPr lang="en-US" sz="1150" dirty="0"/>
+          </a:p>
+          <a:p>
+            <a:pPr indent="0" marL="0">
+              <a:lnSpc>
+                <a:spcPts val="1550"/>
+              </a:lnSpc>
+              <a:buNone/>
+            </a:pPr>
+            <a:endParaRPr lang="en-US" sz="1150" dirty="0"/>
+          </a:p>
+          <a:p>
+            <a:pPr indent="0" marL="0">
+              <a:lnSpc>
+                <a:spcPts val="1550"/>
+              </a:lnSpc>
+              <a:buNone/>
+            </a:pPr>
+            <a:r>
+              <a:rPr lang="en-US" sz="1150" dirty="0">
+                <a:solidFill>
+                  <a:srgbClr val="2F2740"/>
                 </a:solidFill>
                 <a:latin typeface="Calibri" pitchFamily="34" charset="0"/>
                 <a:ea typeface="Calibri" pitchFamily="34" charset="-122"/>
                 <a:cs typeface="Calibri" pitchFamily="34" charset="-120"/>
               </a:rPr>
-              <a:t>This is the one play that stops working the day Mercado Pago is licensed — which is what makes the next twelve months the whole strategy.</a:t>
+              <a:t>Debit one day after the observed payday and delinquency falls. That is crédito de nómina economics without employer deduction — reached through data, not a corporate contract.</a:t>
+            </a:r>
+            <a:endParaRPr lang="en-US" sz="1150" dirty="0"/>
+          </a:p>
+        </p:txBody>
+      </p:sp>
+      <p:sp>
+        <p:nvSpPr>
+          <p:cNvPr id="26" name="Text 24"/>
+          <p:cNvSpPr txBox="1"/>
+          <p:nvPr/>
+        </p:nvSpPr>
+        <p:spPr>
+          <a:xfrm>
+            <a:off x="566928" y="6382512"/>
+            <a:ext cx="11057839" cy="274320"/>
+          </a:xfrm>
+          <a:prstGeom prst="rect">
+            <a:avLst/>
+          </a:prstGeom>
+          <a:noFill/>
+          <a:ln/>
+        </p:spPr>
+        <p:txBody>
+          <a:bodyPr wrap="square" lIns="0" tIns="0" rIns="0" bIns="0" rtlCol="0" anchor="ctr"/>
+          <a:lstStyle/>
+          <a:p>
+            <a:pPr indent="0" marL="0">
+              <a:buNone/>
+            </a:pPr>
+            <a:r>
+              <a:rPr lang="en-US" sz="950" i="1" dirty="0">
+                <a:solidFill>
+                  <a:srgbClr val="6E6484"/>
+                </a:solidFill>
+                <a:latin typeface="Calibri" pitchFamily="34" charset="0"/>
+                <a:ea typeface="Calibri" pitchFamily="34" charset="-122"/>
+                <a:cs typeface="Calibri" pitchFamily="34" charset="-120"/>
+              </a:rPr>
+              <a:t>Metric: completed first salary landings, never requests. The 11-day gap is where the funnel leaks — naming a date is the retention mechanic, not polish.</a:t>
             </a:r>
             <a:endParaRPr lang="en-US" sz="950" dirty="0"/>
           </a:p>

--- a/deck/Core_Mexico_Business_Case.pptx
+++ b/deck/Core_Mexico_Business_Case.pptx
@@ -3532,7 +3532,7 @@
                 <a:ea typeface="Calibri" pitchFamily="34" charset="-122"/>
                 <a:cs typeface="Calibri" pitchFamily="34" charset="-120"/>
               </a:rPr>
-              <a:t>Show our income estimate back, with the reasoning and an appeal path, before we price anyone on it.</a:t>
+              <a:t>Score the customer as if they had repaid in full and on time — then show them the limit that unlocks.</a:t>
             </a:r>
             <a:endParaRPr lang="en-US" sz="1200" dirty="0"/>
           </a:p>
@@ -3561,7 +3561,7 @@
                 <a:ea typeface="Calibri" pitchFamily="34" charset="-122"/>
                 <a:cs typeface="Calibri" pitchFamily="34" charset="-120"/>
               </a:rPr>
-              <a:t>Then show what raises the line: a counterfactual — the specific, reachable actions that unlock the next level, surfaced before the customer has to ask.</a:t>
+              <a:t>That counterfactual is the only question a capped customer actually has: what would have to be different? And the answer is a commitment, not a score.</a:t>
             </a:r>
             <a:endParaRPr lang="en-US" sz="1200" dirty="0"/>
           </a:p>
@@ -3600,7 +3600,7 @@
                 <a:ea typeface="Calibri" pitchFamily="34" charset="-122"/>
                 <a:cs typeface="Calibri" pitchFamily="34" charset="-120"/>
               </a:rPr>
-              <a:t>I shipped counterfactual line-progression at Tala México — same market, same thin-file segment — and it lifted retention 10% in the hardest and riskiest segments. Nu buys retention today with a 13% yield; progression buys it more cheaply, and unlike yield it compounds, because the customer who is climbing is the one who is repaying.</a:t>
+              <a:t>I shipped this in México, to this segment. The non-obvious finding was timing — exposing a limit too early cuts default but gives the gain back through faster repayment cycles, so expose one personalised limit, and only as the due date approaches.</a:t>
             </a:r>
             <a:endParaRPr lang="en-US" sz="950" dirty="0"/>
           </a:p>
@@ -5618,7 +5618,7 @@
                 <a:ea typeface="Calibri" pitchFamily="34" charset="-122"/>
                 <a:cs typeface="Calibri" pitchFamily="34" charset="-120"/>
               </a:rPr>
-              <a:t>Core does not own Card or GBA — so Core should own the currency. “My roadmap versus yours” cannot be won on evidence. “Which sequence makes this customer worth more” can.</a:t>
+              <a:t>Core owns neither Card nor GBA, so Core should own the currency. At Tala my launch criterion was neutral-or-positive monthly credit margin — not my feature’s engagement, not Credit’s default rate. One number downstream of all of us.</a:t>
             </a:r>
             <a:endParaRPr lang="en-US" sz="1150" dirty="0"/>
           </a:p>
@@ -6191,6 +6191,149 @@
                 <a:cs typeface="Calibri" pitchFamily="34" charset="-120"/>
               </a:rPr>
               <a:t>If Card genuinely cannot move, I ship without the card component and add it later. Shipping on time beats winning the argument.</a:t>
+            </a:r>
+            <a:endParaRPr lang="en-US" sz="1150" dirty="0"/>
+          </a:p>
+        </p:txBody>
+      </p:sp>
+      <p:sp>
+        <p:nvSpPr>
+          <p:cNvPr id="26" name="Shape 24"/>
+          <p:cNvSpPr/>
+          <p:nvPr/>
+        </p:nvSpPr>
+        <p:spPr>
+          <a:xfrm>
+            <a:off x="7973568" y="4041648"/>
+            <a:ext cx="292608" cy="292608"/>
+          </a:xfrm>
+          <a:prstGeom prst="ellipse">
+            <a:avLst/>
+          </a:prstGeom>
+          <a:solidFill>
+            <a:srgbClr val="F3E8FD"/>
+          </a:solidFill>
+          <a:ln/>
+        </p:spPr>
+      </p:sp>
+      <p:sp>
+        <p:nvSpPr>
+          <p:cNvPr id="27" name="Text 25"/>
+          <p:cNvSpPr txBox="1"/>
+          <p:nvPr/>
+        </p:nvSpPr>
+        <p:spPr>
+          <a:xfrm>
+            <a:off x="7973568" y="4069080"/>
+            <a:ext cx="292608" cy="237744"/>
+          </a:xfrm>
+          <a:prstGeom prst="rect">
+            <a:avLst/>
+          </a:prstGeom>
+          <a:noFill/>
+          <a:ln/>
+        </p:spPr>
+        <p:txBody>
+          <a:bodyPr wrap="square" lIns="0" tIns="0" rIns="0" bIns="0" rtlCol="0" anchor="ctr"/>
+          <a:lstStyle/>
+          <a:p>
+            <a:pPr algn="ctr" indent="0" marL="0">
+              <a:buNone/>
+            </a:pPr>
+            <a:r>
+              <a:rPr lang="en-US" sz="1250" b="1" dirty="0">
+                <a:solidFill>
+                  <a:srgbClr val="820AD1"/>
+                </a:solidFill>
+                <a:latin typeface="Arial" pitchFamily="34" charset="0"/>
+                <a:ea typeface="Arial" pitchFamily="34" charset="-122"/>
+                <a:cs typeface="Arial" pitchFamily="34" charset="-120"/>
+              </a:rPr>
+              <a:t>6</a:t>
+            </a:r>
+            <a:endParaRPr lang="en-US" sz="1250" dirty="0"/>
+          </a:p>
+        </p:txBody>
+      </p:sp>
+      <p:sp>
+        <p:nvSpPr>
+          <p:cNvPr id="28" name="Text 26"/>
+          <p:cNvSpPr txBox="1"/>
+          <p:nvPr/>
+        </p:nvSpPr>
+        <p:spPr>
+          <a:xfrm>
+            <a:off x="8375904" y="4023360"/>
+            <a:ext cx="3108960" cy="502920"/>
+          </a:xfrm>
+          <a:prstGeom prst="rect">
+            <a:avLst/>
+          </a:prstGeom>
+          <a:noFill/>
+          <a:ln/>
+        </p:spPr>
+        <p:txBody>
+          <a:bodyPr wrap="square" lIns="0" tIns="0" rIns="0" bIns="0" rtlCol="0" anchor="ctr"/>
+          <a:lstStyle/>
+          <a:p>
+            <a:pPr indent="0" marL="0">
+              <a:lnSpc>
+                <a:spcPts val="1600"/>
+              </a:lnSpc>
+              <a:buNone/>
+            </a:pPr>
+            <a:r>
+              <a:rPr lang="en-US" sz="1250" b="1" dirty="0">
+                <a:solidFill>
+                  <a:srgbClr val="19102A"/>
+                </a:solidFill>
+                <a:latin typeface="Arial" pitchFamily="34" charset="0"/>
+                <a:ea typeface="Arial" pitchFamily="34" charset="-122"/>
+                <a:cs typeface="Arial" pitchFamily="34" charset="-120"/>
+              </a:rPr>
+              <a:t>Put the disagreement in a test design.</a:t>
+            </a:r>
+            <a:endParaRPr lang="en-US" sz="1250" dirty="0"/>
+          </a:p>
+        </p:txBody>
+      </p:sp>
+      <p:sp>
+        <p:nvSpPr>
+          <p:cNvPr id="29" name="Text 27"/>
+          <p:cNvSpPr txBox="1"/>
+          <p:nvPr/>
+        </p:nvSpPr>
+        <p:spPr>
+          <a:xfrm>
+            <a:off x="8375904" y="4553712"/>
+            <a:ext cx="3063240" cy="1097280"/>
+          </a:xfrm>
+          <a:prstGeom prst="rect">
+            <a:avLst/>
+          </a:prstGeom>
+          <a:noFill/>
+          <a:ln/>
+        </p:spPr>
+        <p:txBody>
+          <a:bodyPr wrap="square" lIns="0" tIns="0" rIns="0" bIns="0" rtlCol="0" anchor="ctr"/>
+          <a:lstStyle/>
+          <a:p>
+            <a:pPr indent="0" marL="0">
+              <a:lnSpc>
+                <a:spcPts val="1500"/>
+              </a:lnSpc>
+              <a:buNone/>
+            </a:pPr>
+            <a:r>
+              <a:rPr lang="en-US" sz="1150" dirty="0">
+                <a:solidFill>
+                  <a:srgbClr val="2F2740"/>
+                </a:solidFill>
+                <a:latin typeface="Calibri" pitchFamily="34" charset="0"/>
+                <a:ea typeface="Calibri" pitchFamily="34" charset="-122"/>
+                <a:cs typeface="Calibri" pitchFamily="34" charset="-120"/>
+              </a:rPr>
+              <a:t>The fastest way to end a roadmap argument is to convert it into a testable question with a pre-agreed MDE and a guardrail metric the other team chooses. Then we argue about the design, which is solvable — instead of about priority, which is not.</a:t>
             </a:r>
             <a:endParaRPr lang="en-US" sz="1150" dirty="0"/>
           </a:p>
@@ -6485,7 +6628,7 @@
                 <a:ea typeface="Calibri" pitchFamily="34" charset="-122"/>
                 <a:cs typeface="Calibri" pitchFamily="34" charset="-120"/>
               </a:rPr>
-              <a:t>Segment β via a geographic holdout. Re-quote yield as a spread. Retire deposit growth in favour of deployable deposits and cost of funds against TIIE.</a:t>
+              <a:t>Run the gate test above as a geographic holdout, with MDE and guardrails pre-registered. Re-quote yield as a spread. Retire deposit growth in favour of deployable deposits and cost of funds against TIIE.</a:t>
             </a:r>
             <a:endParaRPr lang="en-US" sz="1150" dirty="0"/>
           </a:p>
@@ -14084,7 +14227,7 @@
             </a:avLst>
           </a:prstGeom>
           <a:solidFill>
-            <a:srgbClr val="FAF8FD"/>
+            <a:srgbClr val="F3E8FD"/>
           </a:solidFill>
           <a:ln w="12700">
             <a:solidFill>
@@ -14103,34 +14246,31 @@
         <p:spPr>
           <a:xfrm>
             <a:off x="8485632" y="1965960"/>
-            <a:ext cx="2926080" cy="548640"/>
-          </a:xfrm>
-          <a:prstGeom prst="rect">
-            <a:avLst/>
-          </a:prstGeom>
-          <a:noFill/>
-          <a:ln/>
-        </p:spPr>
-        <p:txBody>
-          <a:bodyPr wrap="square" lIns="0" tIns="0" rIns="0" bIns="0" rtlCol="0" anchor="ctr"/>
-          <a:lstStyle/>
-          <a:p>
-            <a:pPr indent="0" marL="0">
-              <a:lnSpc>
-                <a:spcPts val="1900"/>
-              </a:lnSpc>
+            <a:ext cx="2926080" cy="274320"/>
+          </a:xfrm>
+          <a:prstGeom prst="rect">
+            <a:avLst/>
+          </a:prstGeom>
+          <a:noFill/>
+          <a:ln/>
+        </p:spPr>
+        <p:txBody>
+          <a:bodyPr wrap="square" lIns="0" tIns="0" rIns="0" bIns="0" rtlCol="0" anchor="ctr"/>
+          <a:lstStyle/>
+          <a:p>
+            <a:pPr indent="0" marL="0">
               <a:buNone/>
             </a:pPr>
             <a:r>
               <a:rPr lang="en-US" sz="1400" b="1" dirty="0">
                 <a:solidFill>
-                  <a:srgbClr val="19102A"/>
+                  <a:srgbClr val="820AD1"/>
                 </a:solidFill>
                 <a:latin typeface="Arial" pitchFamily="34" charset="0"/>
                 <a:ea typeface="Arial" pitchFamily="34" charset="-122"/>
                 <a:cs typeface="Arial" pitchFamily="34" charset="-120"/>
               </a:rPr>
-              <a:t>Data I would ask for in week one</a:t>
+              <a:t>The first test I would run</a:t>
             </a:r>
             <a:endParaRPr lang="en-US" sz="1400" dirty="0"/>
           </a:p>
@@ -14144,31 +14284,66 @@
         </p:nvSpPr>
         <p:spPr>
           <a:xfrm>
-            <a:off x="8485632" y="2542032"/>
-            <a:ext cx="2926080" cy="2926080"/>
-          </a:xfrm>
-          <a:prstGeom prst="rect">
-            <a:avLst/>
-          </a:prstGeom>
-          <a:noFill/>
-          <a:ln/>
-        </p:spPr>
-        <p:txBody>
-          <a:bodyPr wrap="square" lIns="0" tIns="0" rIns="0" bIns="0" rtlCol="0" anchor="ctr"/>
-          <a:lstStyle/>
-          <a:p>
-            <a:pPr marL="342900" indent="-342900">
-              <a:lnSpc>
-                <a:spcPts val="1800"/>
-              </a:lnSpc>
-              <a:spcAft>
-                <a:spcPts val="700"/>
-              </a:spcAft>
-              <a:buSzPct val="100000"/>
-              <a:buChar char="•"/>
-            </a:pPr>
-            <a:r>
-              <a:rPr lang="en-US" sz="1150" dirty="0">
+            <a:off x="8485632" y="2331720"/>
+            <a:ext cx="868680" cy="237744"/>
+          </a:xfrm>
+          <a:prstGeom prst="rect">
+            <a:avLst/>
+          </a:prstGeom>
+          <a:noFill/>
+          <a:ln/>
+        </p:spPr>
+        <p:txBody>
+          <a:bodyPr wrap="square" lIns="0" tIns="0" rIns="0" bIns="0" rtlCol="0" anchor="ctr"/>
+          <a:lstStyle/>
+          <a:p>
+            <a:pPr indent="0" marL="0">
+              <a:buNone/>
+            </a:pPr>
+            <a:r>
+              <a:rPr lang="en-US" sz="900" b="1" spc="100" kern="0" dirty="0">
+                <a:solidFill>
+                  <a:srgbClr val="820AD1"/>
+                </a:solidFill>
+                <a:latin typeface="Arial" pitchFamily="34" charset="0"/>
+                <a:ea typeface="Arial" pitchFamily="34" charset="-122"/>
+                <a:cs typeface="Arial" pitchFamily="34" charset="-120"/>
+              </a:rPr>
+              <a:t>UNIT</a:t>
+            </a:r>
+            <a:endParaRPr lang="en-US" sz="900" dirty="0"/>
+          </a:p>
+        </p:txBody>
+      </p:sp>
+      <p:sp>
+        <p:nvSpPr>
+          <p:cNvPr id="24" name="Text 22"/>
+          <p:cNvSpPr txBox="1"/>
+          <p:nvPr/>
+        </p:nvSpPr>
+        <p:spPr>
+          <a:xfrm>
+            <a:off x="8485632" y="2514600"/>
+            <a:ext cx="2926080" cy="384048"/>
+          </a:xfrm>
+          <a:prstGeom prst="rect">
+            <a:avLst/>
+          </a:prstGeom>
+          <a:noFill/>
+          <a:ln/>
+        </p:spPr>
+        <p:txBody>
+          <a:bodyPr wrap="square" lIns="0" tIns="0" rIns="0" bIns="0" rtlCol="0" anchor="ctr"/>
+          <a:lstStyle/>
+          <a:p>
+            <a:pPr indent="0" marL="0">
+              <a:lnSpc>
+                <a:spcPts val="1400"/>
+              </a:lnSpc>
+              <a:buNone/>
+            </a:pPr>
+            <a:r>
+              <a:rPr lang="en-US" sz="1100" dirty="0">
                 <a:solidFill>
                   <a:srgbClr val="2F2740"/>
                 </a:solidFill>
@@ -14176,23 +14351,80 @@
                 <a:ea typeface="Calibri" pitchFamily="34" charset="-122"/>
                 <a:cs typeface="Calibri" pitchFamily="34" charset="-120"/>
               </a:rPr>
-              <a:t>Balance sensitivity by segment, from a geographic rate holdout — not a blended number</a:t>
-            </a:r>
-            <a:endParaRPr lang="en-US" sz="1150" dirty="0"/>
-          </a:p>
-          <a:p>
-            <a:pPr marL="342900" indent="-342900">
-              <a:lnSpc>
-                <a:spcPts val="1800"/>
-              </a:lnSpc>
-              <a:spcAft>
-                <a:spcPts val="700"/>
-              </a:spcAft>
-              <a:buSzPct val="100000"/>
-              <a:buChar char="•"/>
-            </a:pPr>
-            <a:r>
-              <a:rPr lang="en-US" sz="1150" dirty="0">
+              <a:t>Customer, randomised at the Turbo gate</a:t>
+            </a:r>
+            <a:endParaRPr lang="en-US" sz="1100" dirty="0"/>
+          </a:p>
+        </p:txBody>
+      </p:sp>
+      <p:sp>
+        <p:nvSpPr>
+          <p:cNvPr id="25" name="Text 23"/>
+          <p:cNvSpPr txBox="1"/>
+          <p:nvPr/>
+        </p:nvSpPr>
+        <p:spPr>
+          <a:xfrm>
+            <a:off x="8485632" y="2880360"/>
+            <a:ext cx="868680" cy="237744"/>
+          </a:xfrm>
+          <a:prstGeom prst="rect">
+            <a:avLst/>
+          </a:prstGeom>
+          <a:noFill/>
+          <a:ln/>
+        </p:spPr>
+        <p:txBody>
+          <a:bodyPr wrap="square" lIns="0" tIns="0" rIns="0" bIns="0" rtlCol="0" anchor="ctr"/>
+          <a:lstStyle/>
+          <a:p>
+            <a:pPr indent="0" marL="0">
+              <a:buNone/>
+            </a:pPr>
+            <a:r>
+              <a:rPr lang="en-US" sz="900" b="1" spc="100" kern="0" dirty="0">
+                <a:solidFill>
+                  <a:srgbClr val="820AD1"/>
+                </a:solidFill>
+                <a:latin typeface="Arial" pitchFamily="34" charset="0"/>
+                <a:ea typeface="Arial" pitchFamily="34" charset="-122"/>
+                <a:cs typeface="Arial" pitchFamily="34" charset="-120"/>
+              </a:rPr>
+              <a:t>ARMS</a:t>
+            </a:r>
+            <a:endParaRPr lang="en-US" sz="900" dirty="0"/>
+          </a:p>
+        </p:txBody>
+      </p:sp>
+      <p:sp>
+        <p:nvSpPr>
+          <p:cNvPr id="26" name="Text 24"/>
+          <p:cNvSpPr txBox="1"/>
+          <p:nvPr/>
+        </p:nvSpPr>
+        <p:spPr>
+          <a:xfrm>
+            <a:off x="8485632" y="3063240"/>
+            <a:ext cx="2926080" cy="384048"/>
+          </a:xfrm>
+          <a:prstGeom prst="rect">
+            <a:avLst/>
+          </a:prstGeom>
+          <a:noFill/>
+          <a:ln/>
+        </p:spPr>
+        <p:txBody>
+          <a:bodyPr wrap="square" lIns="0" tIns="0" rIns="0" bIns="0" rtlCol="0" anchor="ctr"/>
+          <a:lstStyle/>
+          <a:p>
+            <a:pPr indent="0" marL="0">
+              <a:lnSpc>
+                <a:spcPts val="1400"/>
+              </a:lnSpc>
+              <a:buNone/>
+            </a:pPr>
+            <a:r>
+              <a:rPr lang="en-US" sz="1100" dirty="0">
                 <a:solidFill>
                   <a:srgbClr val="2F2740"/>
                 </a:solidFill>
@@ -14200,23 +14432,80 @@
                 <a:ea typeface="Calibri" pitchFamily="34" charset="-122"/>
                 <a:cs typeface="Calibri" pitchFamily="34" charset="-120"/>
               </a:rPr>
-              <a:t>LTV by acquisition source: yield-acquired vs. income-acquired</a:t>
-            </a:r>
-            <a:endParaRPr lang="en-US" sz="1150" dirty="0"/>
-          </a:p>
-          <a:p>
-            <a:pPr marL="342900" indent="-342900">
-              <a:lnSpc>
-                <a:spcPts val="1800"/>
-              </a:lnSpc>
-              <a:spcAft>
-                <a:spcPts val="700"/>
-              </a:spcAft>
-              <a:buSzPct val="100000"/>
-              <a:buChar char="•"/>
-            </a:pPr>
-            <a:r>
-              <a:rPr lang="en-US" sz="1150" dirty="0">
+              <a:t>Premium gated on income landing, vs. on one card purchase, vs. control</a:t>
+            </a:r>
+            <a:endParaRPr lang="en-US" sz="1100" dirty="0"/>
+          </a:p>
+        </p:txBody>
+      </p:sp>
+      <p:sp>
+        <p:nvSpPr>
+          <p:cNvPr id="27" name="Text 25"/>
+          <p:cNvSpPr txBox="1"/>
+          <p:nvPr/>
+        </p:nvSpPr>
+        <p:spPr>
+          <a:xfrm>
+            <a:off x="8485632" y="3429000"/>
+            <a:ext cx="868680" cy="237744"/>
+          </a:xfrm>
+          <a:prstGeom prst="rect">
+            <a:avLst/>
+          </a:prstGeom>
+          <a:noFill/>
+          <a:ln/>
+        </p:spPr>
+        <p:txBody>
+          <a:bodyPr wrap="square" lIns="0" tIns="0" rIns="0" bIns="0" rtlCol="0" anchor="ctr"/>
+          <a:lstStyle/>
+          <a:p>
+            <a:pPr indent="0" marL="0">
+              <a:buNone/>
+            </a:pPr>
+            <a:r>
+              <a:rPr lang="en-US" sz="900" b="1" spc="100" kern="0" dirty="0">
+                <a:solidFill>
+                  <a:srgbClr val="820AD1"/>
+                </a:solidFill>
+                <a:latin typeface="Arial" pitchFamily="34" charset="0"/>
+                <a:ea typeface="Arial" pitchFamily="34" charset="-122"/>
+                <a:cs typeface="Arial" pitchFamily="34" charset="-120"/>
+              </a:rPr>
+              <a:t>PRIMARY</a:t>
+            </a:r>
+            <a:endParaRPr lang="en-US" sz="900" dirty="0"/>
+          </a:p>
+        </p:txBody>
+      </p:sp>
+      <p:sp>
+        <p:nvSpPr>
+          <p:cNvPr id="28" name="Text 26"/>
+          <p:cNvSpPr txBox="1"/>
+          <p:nvPr/>
+        </p:nvSpPr>
+        <p:spPr>
+          <a:xfrm>
+            <a:off x="8485632" y="3611880"/>
+            <a:ext cx="2926080" cy="384048"/>
+          </a:xfrm>
+          <a:prstGeom prst="rect">
+            <a:avLst/>
+          </a:prstGeom>
+          <a:noFill/>
+          <a:ln/>
+        </p:spPr>
+        <p:txBody>
+          <a:bodyPr wrap="square" lIns="0" tIns="0" rIns="0" bIns="0" rtlCol="0" anchor="ctr"/>
+          <a:lstStyle/>
+          <a:p>
+            <a:pPr indent="0" marL="0">
+              <a:lnSpc>
+                <a:spcPts val="1400"/>
+              </a:lnSpc>
+              <a:buNone/>
+            </a:pPr>
+            <a:r>
+              <a:rPr lang="en-US" sz="1100" dirty="0">
                 <a:solidFill>
                   <a:srgbClr val="2F2740"/>
                 </a:solidFill>
@@ -14224,23 +14513,80 @@
                 <a:ea typeface="Calibri" pitchFamily="34" charset="-122"/>
                 <a:cs typeface="Calibri" pitchFamily="34" charset="-120"/>
               </a:rPr>
-              <a:t>Balance concentration — does the premium cap even bind?</a:t>
-            </a:r>
-            <a:endParaRPr lang="en-US" sz="1150" dirty="0"/>
-          </a:p>
-          <a:p>
-            <a:pPr marL="342900" indent="-342900">
-              <a:lnSpc>
-                <a:spcPts val="1800"/>
-              </a:lnSpc>
-              <a:spcAft>
-                <a:spcPts val="700"/>
-              </a:spcAft>
-              <a:buSzPct val="100000"/>
-              <a:buChar char="•"/>
-            </a:pPr>
-            <a:r>
-              <a:rPr lang="en-US" sz="1150" dirty="0">
+              <a:t>Balance retention · blended cost of funds</a:t>
+            </a:r>
+            <a:endParaRPr lang="en-US" sz="1100" dirty="0"/>
+          </a:p>
+        </p:txBody>
+      </p:sp>
+      <p:sp>
+        <p:nvSpPr>
+          <p:cNvPr id="29" name="Text 27"/>
+          <p:cNvSpPr txBox="1"/>
+          <p:nvPr/>
+        </p:nvSpPr>
+        <p:spPr>
+          <a:xfrm>
+            <a:off x="8485632" y="3977640"/>
+            <a:ext cx="868680" cy="237744"/>
+          </a:xfrm>
+          <a:prstGeom prst="rect">
+            <a:avLst/>
+          </a:prstGeom>
+          <a:noFill/>
+          <a:ln/>
+        </p:spPr>
+        <p:txBody>
+          <a:bodyPr wrap="square" lIns="0" tIns="0" rIns="0" bIns="0" rtlCol="0" anchor="ctr"/>
+          <a:lstStyle/>
+          <a:p>
+            <a:pPr indent="0" marL="0">
+              <a:buNone/>
+            </a:pPr>
+            <a:r>
+              <a:rPr lang="en-US" sz="900" b="1" spc="100" kern="0" dirty="0">
+                <a:solidFill>
+                  <a:srgbClr val="820AD1"/>
+                </a:solidFill>
+                <a:latin typeface="Arial" pitchFamily="34" charset="0"/>
+                <a:ea typeface="Arial" pitchFamily="34" charset="-122"/>
+                <a:cs typeface="Arial" pitchFamily="34" charset="-120"/>
+              </a:rPr>
+              <a:t>GUARDRAIL</a:t>
+            </a:r>
+            <a:endParaRPr lang="en-US" sz="900" dirty="0"/>
+          </a:p>
+        </p:txBody>
+      </p:sp>
+      <p:sp>
+        <p:nvSpPr>
+          <p:cNvPr id="30" name="Text 28"/>
+          <p:cNvSpPr txBox="1"/>
+          <p:nvPr/>
+        </p:nvSpPr>
+        <p:spPr>
+          <a:xfrm>
+            <a:off x="8485632" y="4160520"/>
+            <a:ext cx="2926080" cy="384048"/>
+          </a:xfrm>
+          <a:prstGeom prst="rect">
+            <a:avLst/>
+          </a:prstGeom>
+          <a:noFill/>
+          <a:ln/>
+        </p:spPr>
+        <p:txBody>
+          <a:bodyPr wrap="square" lIns="0" tIns="0" rIns="0" bIns="0" rtlCol="0" anchor="ctr"/>
+          <a:lstStyle/>
+          <a:p>
+            <a:pPr indent="0" marL="0">
+              <a:lnSpc>
+                <a:spcPts val="1400"/>
+              </a:lnSpc>
+              <a:buNone/>
+            </a:pPr>
+            <a:r>
+              <a:rPr lang="en-US" sz="1100" dirty="0">
                 <a:solidFill>
                   <a:srgbClr val="2F2740"/>
                 </a:solidFill>
@@ -14248,23 +14594,80 @@
                 <a:ea typeface="Calibri" pitchFamily="34" charset="-122"/>
                 <a:cs typeface="Calibri" pitchFamily="34" charset="-120"/>
               </a:rPr>
-              <a:t>Attrition elasticity vs. the competitor gap, not vs. our own rate</a:t>
-            </a:r>
-            <a:endParaRPr lang="en-US" sz="1150" dirty="0"/>
-          </a:p>
-          <a:p>
-            <a:pPr marL="342900" indent="-342900">
-              <a:lnSpc>
-                <a:spcPts val="1800"/>
-              </a:lnSpc>
-              <a:spcAft>
-                <a:spcPts val="700"/>
-              </a:spcAft>
-              <a:buSzPct val="100000"/>
-              <a:buChar char="•"/>
-            </a:pPr>
-            <a:r>
-              <a:rPr lang="en-US" sz="1150" dirty="0">
+              <a:t>Card transaction volume — Card’s metric, agreed with them before launch</a:t>
+            </a:r>
+            <a:endParaRPr lang="en-US" sz="1100" dirty="0"/>
+          </a:p>
+        </p:txBody>
+      </p:sp>
+      <p:sp>
+        <p:nvSpPr>
+          <p:cNvPr id="31" name="Text 29"/>
+          <p:cNvSpPr txBox="1"/>
+          <p:nvPr/>
+        </p:nvSpPr>
+        <p:spPr>
+          <a:xfrm>
+            <a:off x="8485632" y="4526280"/>
+            <a:ext cx="868680" cy="237744"/>
+          </a:xfrm>
+          <a:prstGeom prst="rect">
+            <a:avLst/>
+          </a:prstGeom>
+          <a:noFill/>
+          <a:ln/>
+        </p:spPr>
+        <p:txBody>
+          <a:bodyPr wrap="square" lIns="0" tIns="0" rIns="0" bIns="0" rtlCol="0" anchor="ctr"/>
+          <a:lstStyle/>
+          <a:p>
+            <a:pPr indent="0" marL="0">
+              <a:buNone/>
+            </a:pPr>
+            <a:r>
+              <a:rPr lang="en-US" sz="900" b="1" spc="100" kern="0" dirty="0">
+                <a:solidFill>
+                  <a:srgbClr val="820AD1"/>
+                </a:solidFill>
+                <a:latin typeface="Arial" pitchFamily="34" charset="0"/>
+                <a:ea typeface="Arial" pitchFamily="34" charset="-122"/>
+                <a:cs typeface="Arial" pitchFamily="34" charset="-120"/>
+              </a:rPr>
+              <a:t>ACCEPT</a:t>
+            </a:r>
+            <a:endParaRPr lang="en-US" sz="900" dirty="0"/>
+          </a:p>
+        </p:txBody>
+      </p:sp>
+      <p:sp>
+        <p:nvSpPr>
+          <p:cNvPr id="32" name="Text 30"/>
+          <p:cNvSpPr txBox="1"/>
+          <p:nvPr/>
+        </p:nvSpPr>
+        <p:spPr>
+          <a:xfrm>
+            <a:off x="8485632" y="4709160"/>
+            <a:ext cx="2926080" cy="384048"/>
+          </a:xfrm>
+          <a:prstGeom prst="rect">
+            <a:avLst/>
+          </a:prstGeom>
+          <a:noFill/>
+          <a:ln/>
+        </p:spPr>
+        <p:txBody>
+          <a:bodyPr wrap="square" lIns="0" tIns="0" rIns="0" bIns="0" rtlCol="0" anchor="ctr"/>
+          <a:lstStyle/>
+          <a:p>
+            <a:pPr indent="0" marL="0">
+              <a:lnSpc>
+                <a:spcPts val="1400"/>
+              </a:lnSpc>
+              <a:buNone/>
+            </a:pPr>
+            <a:r>
+              <a:rPr lang="en-US" sz="1100" dirty="0">
                 <a:solidFill>
                   <a:srgbClr val="2F2740"/>
                 </a:solidFill>
@@ -14272,15 +14675,96 @@
                 <a:ea typeface="Calibri" pitchFamily="34" charset="-122"/>
                 <a:cs typeface="Calibri" pitchFamily="34" charset="-120"/>
               </a:rPr>
-              <a:t>Marginal risk-adjusted credit yield — is deployment actually accretive?</a:t>
-            </a:r>
-            <a:endParaRPr lang="en-US" sz="1150" dirty="0"/>
-          </a:p>
-        </p:txBody>
-      </p:sp>
-      <p:sp>
-        <p:nvSpPr>
-          <p:cNvPr id="24" name="Text 22"/>
+              <a:t>Neutral or positive contribution margin. Do no harm.</a:t>
+            </a:r>
+            <a:endParaRPr lang="en-US" sz="1100" dirty="0"/>
+          </a:p>
+        </p:txBody>
+      </p:sp>
+      <p:sp>
+        <p:nvSpPr>
+          <p:cNvPr id="33" name="Text 31"/>
+          <p:cNvSpPr txBox="1"/>
+          <p:nvPr/>
+        </p:nvSpPr>
+        <p:spPr>
+          <a:xfrm>
+            <a:off x="8485632" y="5074920"/>
+            <a:ext cx="868680" cy="237744"/>
+          </a:xfrm>
+          <a:prstGeom prst="rect">
+            <a:avLst/>
+          </a:prstGeom>
+          <a:noFill/>
+          <a:ln/>
+        </p:spPr>
+        <p:txBody>
+          <a:bodyPr wrap="square" lIns="0" tIns="0" rIns="0" bIns="0" rtlCol="0" anchor="ctr"/>
+          <a:lstStyle/>
+          <a:p>
+            <a:pPr indent="0" marL="0">
+              <a:buNone/>
+            </a:pPr>
+            <a:r>
+              <a:rPr lang="en-US" sz="900" b="1" spc="100" kern="0" dirty="0">
+                <a:solidFill>
+                  <a:srgbClr val="820AD1"/>
+                </a:solidFill>
+                <a:latin typeface="Arial" pitchFamily="34" charset="0"/>
+                <a:ea typeface="Arial" pitchFamily="34" charset="-122"/>
+                <a:cs typeface="Arial" pitchFamily="34" charset="-120"/>
+              </a:rPr>
+              <a:t>SET FIRST</a:t>
+            </a:r>
+            <a:endParaRPr lang="en-US" sz="900" dirty="0"/>
+          </a:p>
+        </p:txBody>
+      </p:sp>
+      <p:sp>
+        <p:nvSpPr>
+          <p:cNvPr id="34" name="Text 32"/>
+          <p:cNvSpPr txBox="1"/>
+          <p:nvPr/>
+        </p:nvSpPr>
+        <p:spPr>
+          <a:xfrm>
+            <a:off x="8485632" y="5257800"/>
+            <a:ext cx="2926080" cy="384048"/>
+          </a:xfrm>
+          <a:prstGeom prst="rect">
+            <a:avLst/>
+          </a:prstGeom>
+          <a:noFill/>
+          <a:ln/>
+        </p:spPr>
+        <p:txBody>
+          <a:bodyPr wrap="square" lIns="0" tIns="0" rIns="0" bIns="0" rtlCol="0" anchor="ctr"/>
+          <a:lstStyle/>
+          <a:p>
+            <a:pPr indent="0" marL="0">
+              <a:lnSpc>
+                <a:spcPts val="1400"/>
+              </a:lnSpc>
+              <a:buNone/>
+            </a:pPr>
+            <a:r>
+              <a:rPr lang="en-US" sz="1100" dirty="0">
+                <a:solidFill>
+                  <a:srgbClr val="2F2740"/>
+                </a:solidFill>
+                <a:latin typeface="Calibri" pitchFamily="34" charset="0"/>
+                <a:ea typeface="Calibri" pitchFamily="34" charset="-122"/>
+                <a:cs typeface="Calibri" pitchFamily="34" charset="-120"/>
+              </a:rPr>
+              <a:t>MDE and power before launch, never after</a:t>
+            </a:r>
+            <a:endParaRPr lang="en-US" sz="1100" dirty="0"/>
+          </a:p>
+        </p:txBody>
+      </p:sp>
+      <p:sp>
+        <p:nvSpPr>
+          <p:cNvPr id="35" name="Text 33"/>
           <p:cNvSpPr txBox="1"/>
           <p:nvPr/>
         </p:nvSpPr>

--- a/deck/Core_Mexico_Business_Case.pptx
+++ b/deck/Core_Mexico_Business_Case.pptx
@@ -3504,27 +3504,27 @@
         </p:nvSpPr>
         <p:spPr>
           <a:xfrm>
-            <a:off x="8330184" y="3291840"/>
-            <a:ext cx="3063240" cy="1737360"/>
-          </a:xfrm>
-          <a:prstGeom prst="rect">
-            <a:avLst/>
-          </a:prstGeom>
-          <a:noFill/>
-          <a:ln/>
-        </p:spPr>
-        <p:txBody>
-          <a:bodyPr wrap="square" lIns="0" tIns="0" rIns="0" bIns="0" rtlCol="0" anchor="ctr"/>
-          <a:lstStyle/>
-          <a:p>
-            <a:pPr indent="0" marL="0">
-              <a:lnSpc>
-                <a:spcPts val="1650"/>
-              </a:lnSpc>
-              <a:buNone/>
-            </a:pPr>
-            <a:r>
-              <a:rPr lang="en-US" sz="1200" dirty="0">
+            <a:off x="8330184" y="3273552"/>
+            <a:ext cx="3063240" cy="713232"/>
+          </a:xfrm>
+          <a:prstGeom prst="rect">
+            <a:avLst/>
+          </a:prstGeom>
+          <a:noFill/>
+          <a:ln/>
+        </p:spPr>
+        <p:txBody>
+          <a:bodyPr wrap="square" lIns="0" tIns="0" rIns="0" bIns="0" rtlCol="0" anchor="ctr"/>
+          <a:lstStyle/>
+          <a:p>
+            <a:pPr indent="0" marL="0">
+              <a:lnSpc>
+                <a:spcPts val="1600"/>
+              </a:lnSpc>
+              <a:buNone/>
+            </a:pPr>
+            <a:r>
+              <a:rPr lang="en-US" sz="1150" dirty="0">
                 <a:solidFill>
                   <a:srgbClr val="2F2740"/>
                 </a:solidFill>
@@ -3532,28 +3532,119 @@
                 <a:ea typeface="Calibri" pitchFamily="34" charset="-122"/>
                 <a:cs typeface="Calibri" pitchFamily="34" charset="-120"/>
               </a:rPr>
-              <a:t>Score the customer as if they had repaid in full and on time — then show them the limit that unlocks.</a:t>
-            </a:r>
-            <a:endParaRPr lang="en-US" sz="1200" dirty="0"/>
-          </a:p>
-          <a:p>
-            <a:pPr indent="0" marL="0">
-              <a:lnSpc>
-                <a:spcPts val="1650"/>
-              </a:lnSpc>
-              <a:buNone/>
-            </a:pPr>
-            <a:endParaRPr lang="en-US" sz="1200" dirty="0"/>
-          </a:p>
-          <a:p>
-            <a:pPr indent="0" marL="0">
-              <a:lnSpc>
-                <a:spcPts val="1650"/>
-              </a:lnSpc>
-              <a:buNone/>
-            </a:pPr>
-            <a:r>
-              <a:rPr lang="en-US" sz="1200" dirty="0">
+              <a:t>Score the customer as if they had repaid on time, then show the limit that unlocks — a commitment, not a score.</a:t>
+            </a:r>
+            <a:endParaRPr lang="en-US" sz="1150" dirty="0"/>
+          </a:p>
+        </p:txBody>
+      </p:sp>
+      <p:sp>
+        <p:nvSpPr>
+          <p:cNvPr id="17" name="Text 15"/>
+          <p:cNvSpPr txBox="1"/>
+          <p:nvPr/>
+        </p:nvSpPr>
+        <p:spPr>
+          <a:xfrm>
+            <a:off x="8330184" y="4023360"/>
+            <a:ext cx="3063240" cy="219456"/>
+          </a:xfrm>
+          <a:prstGeom prst="rect">
+            <a:avLst/>
+          </a:prstGeom>
+          <a:noFill/>
+          <a:ln/>
+        </p:spPr>
+        <p:txBody>
+          <a:bodyPr wrap="square" lIns="0" tIns="0" rIns="0" bIns="0" rtlCol="0" anchor="ctr"/>
+          <a:lstStyle/>
+          <a:p>
+            <a:pPr indent="0" marL="0">
+              <a:buNone/>
+            </a:pPr>
+            <a:r>
+              <a:rPr lang="en-US" sz="950" b="1" spc="90" kern="0" dirty="0">
+                <a:solidFill>
+                  <a:srgbClr val="820AD1"/>
+                </a:solidFill>
+                <a:latin typeface="Arial" pitchFamily="34" charset="0"/>
+                <a:ea typeface="Arial" pitchFamily="34" charset="-122"/>
+                <a:cs typeface="Arial" pitchFamily="34" charset="-120"/>
+              </a:rPr>
+              <a:t>TESTED IN MÉXICO, THIS SEGMENT</a:t>
+            </a:r>
+            <a:endParaRPr lang="en-US" sz="950" dirty="0"/>
+          </a:p>
+        </p:txBody>
+      </p:sp>
+      <p:sp>
+        <p:nvSpPr>
+          <p:cNvPr id="18" name="Text 16"/>
+          <p:cNvSpPr txBox="1"/>
+          <p:nvPr/>
+        </p:nvSpPr>
+        <p:spPr>
+          <a:xfrm>
+            <a:off x="8330184" y="4242816"/>
+            <a:ext cx="3063240" cy="310896"/>
+          </a:xfrm>
+          <a:prstGeom prst="rect">
+            <a:avLst/>
+          </a:prstGeom>
+          <a:noFill/>
+          <a:ln/>
+        </p:spPr>
+        <p:txBody>
+          <a:bodyPr wrap="square" lIns="0" tIns="0" rIns="0" bIns="0" rtlCol="0" anchor="ctr"/>
+          <a:lstStyle/>
+          <a:p>
+            <a:pPr indent="0" marL="0">
+              <a:buNone/>
+            </a:pPr>
+            <a:r>
+              <a:rPr lang="en-US" sz="1700" b="1" dirty="0">
+                <a:solidFill>
+                  <a:srgbClr val="820AD1"/>
+                </a:solidFill>
+                <a:latin typeface="Arial" pitchFamily="34" charset="0"/>
+                <a:ea typeface="Arial" pitchFamily="34" charset="-122"/>
+                <a:cs typeface="Arial" pitchFamily="34" charset="-120"/>
+              </a:rPr>
+              <a:t>−1.43%</a:t>
+            </a:r>
+            <a:endParaRPr lang="en-US" sz="1700" dirty="0"/>
+          </a:p>
+        </p:txBody>
+      </p:sp>
+      <p:sp>
+        <p:nvSpPr>
+          <p:cNvPr id="19" name="Text 17"/>
+          <p:cNvSpPr txBox="1"/>
+          <p:nvPr/>
+        </p:nvSpPr>
+        <p:spPr>
+          <a:xfrm>
+            <a:off x="8330184" y="4572000"/>
+            <a:ext cx="3063240" cy="502920"/>
+          </a:xfrm>
+          <a:prstGeom prst="rect">
+            <a:avLst/>
+          </a:prstGeom>
+          <a:noFill/>
+          <a:ln/>
+        </p:spPr>
+        <p:txBody>
+          <a:bodyPr wrap="square" lIns="0" tIns="0" rIns="0" bIns="0" rtlCol="0" anchor="ctr"/>
+          <a:lstStyle/>
+          <a:p>
+            <a:pPr indent="0" marL="0">
+              <a:lnSpc>
+                <a:spcPts val="1350"/>
+              </a:lnSpc>
+              <a:buNone/>
+            </a:pPr>
+            <a:r>
+              <a:rPr lang="en-US" sz="1050" dirty="0">
                 <a:solidFill>
                   <a:srgbClr val="2F2740"/>
                 </a:solidFill>
@@ -3561,15 +3652,15 @@
                 <a:ea typeface="Calibri" pitchFamily="34" charset="-122"/>
                 <a:cs typeface="Calibri" pitchFamily="34" charset="-120"/>
               </a:rPr>
-              <a:t>That counterfactual is the only question a capped customer actually has: what would have to be different? And the answer is a commitment, not a score.</a:t>
-            </a:r>
-            <a:endParaRPr lang="en-US" sz="1200" dirty="0"/>
-          </a:p>
-        </p:txBody>
-      </p:sp>
-      <p:sp>
-        <p:nvSpPr>
-          <p:cNvPr id="17" name="Text 15"/>
+              <a:t>default rate, ITT, at 10 days pre-due. 95% CI −2.00 to −0.90. No significant move at 3 days.</a:t>
+            </a:r>
+            <a:endParaRPr lang="en-US" sz="1050" dirty="0"/>
+          </a:p>
+        </p:txBody>
+      </p:sp>
+      <p:sp>
+        <p:nvSpPr>
+          <p:cNvPr id="20" name="Text 18"/>
           <p:cNvSpPr txBox="1"/>
           <p:nvPr/>
         </p:nvSpPr>
@@ -3600,7 +3691,7 @@
                 <a:ea typeface="Calibri" pitchFamily="34" charset="-122"/>
                 <a:cs typeface="Calibri" pitchFamily="34" charset="-120"/>
               </a:rPr>
-              <a:t>I shipped this in México, to this segment. The non-obvious finding was timing — exposing a limit too early cuts default but gives the gain back through faster repayment cycles, so expose one personalised limit, and only as the due date approaches.</a:t>
+              <a:t>Conditional on receiving the offer, 3 days performed the same as 10 (−2.31% vs −2.25%). Ten days won the diluted read because more customers received an offer at all — 56% of loans against 38%.</a:t>
             </a:r>
             <a:endParaRPr lang="en-US" sz="950" dirty="0"/>
           </a:p>
@@ -13499,7 +13590,7 @@
                 <a:ea typeface="Calibri" pitchFamily="34" charset="-122"/>
                 <a:cs typeface="Calibri" pitchFamily="34" charset="-120"/>
               </a:rPr>
-              <a:t>Employer-side distribution is deliberately last: the incumbents have sold to HR for thirty years, and consumer pull is the only motion where a challenger starts ahead.</a:t>
+              <a:t>And ship the simple version first: when I tested this in México, a plain loan-number ladder captured about four fifths of what a fully personalised causal model achieved. Personalisation earns its place later.</a:t>
             </a:r>
             <a:endParaRPr lang="en-US" sz="950" dirty="0"/>
           </a:p>

--- a/deck/Core_Mexico_Business_Case.pptx
+++ b/deck/Core_Mexico_Business_Case.pptx
@@ -1243,7 +1243,7 @@
           <a:p>
             <a:r>
               <a:rPr lang="en-US" dirty="0"/>
-              <a:t/>
+              <a:t>If asked what the non-financial component looks like in México: not Netflix. Recargas — Cuenta Nu already processes mobile top-ups from 30+ carriers, so the rail exists and is simply not part of a bundle yet.</a:t>
             </a:r>
             <a:endParaRPr lang="en-US" dirty="0"/>
           </a:p>
@@ -6571,7 +6571,7 @@
         </p:nvSpPr>
         <p:spPr>
           <a:xfrm>
-            <a:off x="566928" y="1783080"/>
+            <a:off x="566928" y="1755648"/>
             <a:ext cx="548640" cy="365760"/>
           </a:xfrm>
           <a:prstGeom prst="rect">
@@ -6610,7 +6610,7 @@
         </p:nvSpPr>
         <p:spPr>
           <a:xfrm>
-            <a:off x="1225296" y="1764792"/>
+            <a:off x="1225296" y="1737360"/>
             <a:ext cx="3657600" cy="548640"/>
           </a:xfrm>
           <a:prstGeom prst="rect">
@@ -6652,7 +6652,7 @@
         </p:nvSpPr>
         <p:spPr>
           <a:xfrm>
-            <a:off x="1225296" y="2350008"/>
+            <a:off x="1225296" y="2322576"/>
             <a:ext cx="2011680" cy="237744"/>
           </a:xfrm>
           <a:prstGeom prst="rect">
@@ -6691,7 +6691,7 @@
         </p:nvSpPr>
         <p:spPr>
           <a:xfrm>
-            <a:off x="5047488" y="1764792"/>
+            <a:off x="5047488" y="1737360"/>
             <a:ext cx="3200400" cy="1005840"/>
           </a:xfrm>
           <a:prstGeom prst="rect">
@@ -6733,7 +6733,7 @@
         </p:nvSpPr>
         <p:spPr>
           <a:xfrm>
-            <a:off x="8430768" y="1764792"/>
+            <a:off x="8430768" y="1737360"/>
             <a:ext cx="3246120" cy="1005840"/>
           </a:xfrm>
           <a:prstGeom prst="rect">
@@ -6775,7 +6775,7 @@
         </p:nvSpPr>
         <p:spPr>
           <a:xfrm>
-            <a:off x="566928" y="2916936"/>
+            <a:off x="566928" y="2834640"/>
             <a:ext cx="548640" cy="365760"/>
           </a:xfrm>
           <a:prstGeom prst="rect">
@@ -6814,7 +6814,7 @@
         </p:nvSpPr>
         <p:spPr>
           <a:xfrm>
-            <a:off x="1225296" y="2898648"/>
+            <a:off x="1225296" y="2816352"/>
             <a:ext cx="3657600" cy="548640"/>
           </a:xfrm>
           <a:prstGeom prst="rect">
@@ -6856,7 +6856,7 @@
         </p:nvSpPr>
         <p:spPr>
           <a:xfrm>
-            <a:off x="1225296" y="3483864"/>
+            <a:off x="1225296" y="3401568"/>
             <a:ext cx="2011680" cy="237744"/>
           </a:xfrm>
           <a:prstGeom prst="rect">
@@ -6895,7 +6895,7 @@
         </p:nvSpPr>
         <p:spPr>
           <a:xfrm>
-            <a:off x="5047488" y="2898648"/>
+            <a:off x="5047488" y="2816352"/>
             <a:ext cx="3200400" cy="1005840"/>
           </a:xfrm>
           <a:prstGeom prst="rect">
@@ -6937,7 +6937,7 @@
         </p:nvSpPr>
         <p:spPr>
           <a:xfrm>
-            <a:off x="8430768" y="2898648"/>
+            <a:off x="8430768" y="2816352"/>
             <a:ext cx="3246120" cy="1005840"/>
           </a:xfrm>
           <a:prstGeom prst="rect">
@@ -6979,7 +6979,7 @@
         </p:nvSpPr>
         <p:spPr>
           <a:xfrm>
-            <a:off x="566928" y="4050792"/>
+            <a:off x="566928" y="3913632"/>
             <a:ext cx="548640" cy="365760"/>
           </a:xfrm>
           <a:prstGeom prst="rect">
@@ -7018,7 +7018,7 @@
         </p:nvSpPr>
         <p:spPr>
           <a:xfrm>
-            <a:off x="1225296" y="4032504"/>
+            <a:off x="1225296" y="3895344"/>
             <a:ext cx="3657600" cy="548640"/>
           </a:xfrm>
           <a:prstGeom prst="rect">
@@ -7060,7 +7060,7 @@
         </p:nvSpPr>
         <p:spPr>
           <a:xfrm>
-            <a:off x="1225296" y="4617720"/>
+            <a:off x="1225296" y="4480560"/>
             <a:ext cx="2011680" cy="237744"/>
           </a:xfrm>
           <a:prstGeom prst="rect">
@@ -7099,7 +7099,7 @@
         </p:nvSpPr>
         <p:spPr>
           <a:xfrm>
-            <a:off x="5047488" y="4032504"/>
+            <a:off x="5047488" y="3895344"/>
             <a:ext cx="3200400" cy="1005840"/>
           </a:xfrm>
           <a:prstGeom prst="rect">
@@ -7141,7 +7141,7 @@
         </p:nvSpPr>
         <p:spPr>
           <a:xfrm>
-            <a:off x="8430768" y="4032504"/>
+            <a:off x="8430768" y="3895344"/>
             <a:ext cx="3246120" cy="1005840"/>
           </a:xfrm>
           <a:prstGeom prst="rect">
@@ -7183,12 +7183,12 @@
         </p:nvSpPr>
         <p:spPr>
           <a:xfrm>
-            <a:off x="566928" y="5230368"/>
-            <a:ext cx="11073384" cy="1060704"/>
+            <a:off x="566928" y="5047488"/>
+            <a:ext cx="11073384" cy="1261872"/>
           </a:xfrm>
           <a:prstGeom prst="roundRect">
             <a:avLst>
-              <a:gd name="adj" fmla="val 5172"/>
+              <a:gd name="adj" fmla="val 4348"/>
             </a:avLst>
           </a:prstGeom>
           <a:solidFill>
@@ -7210,27 +7210,27 @@
         </p:nvSpPr>
         <p:spPr>
           <a:xfrm>
-            <a:off x="841248" y="5431536"/>
-            <a:ext cx="10515600" cy="731520"/>
-          </a:xfrm>
-          <a:prstGeom prst="rect">
-            <a:avLst/>
-          </a:prstGeom>
-          <a:noFill/>
-          <a:ln/>
-        </p:spPr>
-        <p:txBody>
-          <a:bodyPr wrap="square" lIns="0" tIns="0" rIns="0" bIns="0" rtlCol="0" anchor="ctr"/>
-          <a:lstStyle/>
-          <a:p>
-            <a:pPr indent="0" marL="0">
-              <a:lnSpc>
-                <a:spcPts val="1700"/>
-              </a:lnSpc>
-              <a:buNone/>
-            </a:pPr>
-            <a:r>
-              <a:rPr lang="en-US" sz="1250" b="1" dirty="0">
+            <a:off x="841248" y="5230368"/>
+            <a:ext cx="10515600" cy="960120"/>
+          </a:xfrm>
+          <a:prstGeom prst="rect">
+            <a:avLst/>
+          </a:prstGeom>
+          <a:noFill/>
+          <a:ln/>
+        </p:spPr>
+        <p:txBody>
+          <a:bodyPr wrap="square" lIns="0" tIns="0" rIns="0" bIns="0" rtlCol="0" anchor="ctr"/>
+          <a:lstStyle/>
+          <a:p>
+            <a:pPr indent="0" marL="0">
+              <a:lnSpc>
+                <a:spcPts val="1650"/>
+              </a:lnSpc>
+              <a:buNone/>
+            </a:pPr>
+            <a:r>
+              <a:rPr lang="en-US" sz="1200" b="1" dirty="0">
                 <a:solidFill>
                   <a:srgbClr val="820AD1"/>
                 </a:solidFill>
@@ -7242,12 +7242,12 @@
             </a:r>
             <a:pPr indent="0" marL="0">
               <a:lnSpc>
-                <a:spcPts val="1700"/>
-              </a:lnSpc>
-              <a:buNone/>
-            </a:pPr>
-            <a:r>
-              <a:rPr lang="en-US" sz="1250" dirty="0">
+                <a:spcPts val="1650"/>
+              </a:lnSpc>
+              <a:buNone/>
+            </a:pPr>
+            <a:r>
+              <a:rPr lang="en-US" sz="1200" dirty="0">
                 <a:solidFill>
                   <a:srgbClr val="2F2740"/>
                 </a:solidFill>
@@ -7255,9 +7255,9 @@
                 <a:ea typeface="Calibri" pitchFamily="34" charset="-122"/>
                 <a:cs typeface="Calibri" pitchFamily="34" charset="-120"/>
               </a:rPr>
-              <a:t>the argument is not “México is different”, it is “México is the proving ground”. Every market Nu enters next will arrive newly licensed, with a low LDR and no income visibility — exactly where México is now. Asks framed as local exceptions lose. Asks framed as reusable platform capability win.</a:t>
-            </a:r>
-            <a:endParaRPr lang="en-US" sz="1250" dirty="0"/>
+              <a:t>Croma — launched in Brazil in July for customers earning R$5,000+ — is the group’s newest bundle: platinum card, streaming cashback, telco, boosted box. The architecture is right, but it monetises spend and subscriptions, and my segment’s spend is small and irregular. México needs that architecture with a different anchor. Brazil anchors on spend; México anchors on income landing — and that is the instance every newly licensed market will need first.</a:t>
+            </a:r>
+            <a:endParaRPr lang="en-US" sz="1200" dirty="0"/>
           </a:p>
         </p:txBody>
       </p:sp>
@@ -12627,7 +12627,7 @@
                 <a:ea typeface="Calibri" pitchFamily="34" charset="-122"/>
                 <a:cs typeface="Calibri" pitchFamily="34" charset="-120"/>
               </a:rPr>
-              <a:t>Rates as published by Nu México, calculated 10 Aug 2026, in force to 7 Oct 2026 — read from public pages, so treat as my assumption. One tier, two doors: documented and observed income must reach identical terms.</a:t>
+              <a:t>Brazil runs the same architecture — a capped, boosted box, quoted as 120% of CDI. The capped box is the group pattern; the gate and the quoting convention are what differ. Rates as published, 10 Aug 2026.</a:t>
             </a:r>
             <a:endParaRPr lang="en-US" sz="950" dirty="0"/>
           </a:p>
@@ -13866,7 +13866,7 @@
                 <a:ea typeface="Calibri" pitchFamily="34" charset="-122"/>
                 <a:cs typeface="Calibri" pitchFamily="34" charset="-120"/>
               </a:rPr>
-              <a:t>Today it is “13% fija”, so every cut must be announced — January’s produced “ganarás menos por tus ahorros”. Quoted against CETES, funding cost falls as Banxico moves, with no headline.</a:t>
+              <a:t>Brazil already quotes its equivalent box as 120% of CDI. México quotes “13% fija”, so every cut must be announced — January’s made headlines. México is the outlier here, not the innovator.</a:t>
             </a:r>
             <a:endParaRPr lang="en-US" sz="1150" dirty="0"/>
           </a:p>
@@ -14861,27 +14861,27 @@
         </p:nvSpPr>
         <p:spPr>
           <a:xfrm>
-            <a:off x="566928" y="4892040"/>
-            <a:ext cx="7406640" cy="822960"/>
-          </a:xfrm>
-          <a:prstGeom prst="rect">
-            <a:avLst/>
-          </a:prstGeom>
-          <a:noFill/>
-          <a:ln/>
-        </p:spPr>
-        <p:txBody>
-          <a:bodyPr wrap="square" lIns="0" tIns="0" rIns="0" bIns="0" rtlCol="0" anchor="ctr"/>
-          <a:lstStyle/>
-          <a:p>
-            <a:pPr indent="0" marL="0">
-              <a:lnSpc>
-                <a:spcPts val="1800"/>
-              </a:lnSpc>
-              <a:buNone/>
-            </a:pPr>
-            <a:r>
-              <a:rPr lang="en-US" sz="1300" b="1" dirty="0">
+            <a:off x="566928" y="4828032"/>
+            <a:ext cx="7406640" cy="1051560"/>
+          </a:xfrm>
+          <a:prstGeom prst="rect">
+            <a:avLst/>
+          </a:prstGeom>
+          <a:noFill/>
+          <a:ln/>
+        </p:spPr>
+        <p:txBody>
+          <a:bodyPr wrap="square" lIns="0" tIns="0" rIns="0" bIns="0" rtlCol="0" anchor="ctr"/>
+          <a:lstStyle/>
+          <a:p>
+            <a:pPr indent="0" marL="0">
+              <a:lnSpc>
+                <a:spcPts val="1700"/>
+              </a:lnSpc>
+              <a:buNone/>
+            </a:pPr>
+            <a:r>
+              <a:rPr lang="en-US" sz="1250" b="1" dirty="0">
                 <a:solidFill>
                   <a:srgbClr val="19102A"/>
                 </a:solidFill>
@@ -14889,16 +14889,16 @@
                 <a:ea typeface="Calibri" pitchFamily="34" charset="-122"/>
                 <a:cs typeface="Calibri" pitchFamily="34" charset="-120"/>
               </a:rPr>
-              <a:t>The trade-off, said out loud:  </a:t>
-            </a:r>
-            <a:pPr indent="0" marL="0">
-              <a:lnSpc>
-                <a:spcPts val="1800"/>
-              </a:lnSpc>
-              <a:buNone/>
-            </a:pPr>
-            <a:r>
-              <a:rPr lang="en-US" sz="1300" dirty="0">
+              <a:t>The base was never bought with rate.  </a:t>
+            </a:r>
+            <a:pPr indent="0" marL="0">
+              <a:lnSpc>
+                <a:spcPts val="1700"/>
+              </a:lnSpc>
+              <a:buNone/>
+            </a:pPr>
+            <a:r>
+              <a:rPr lang="en-US" sz="1250" dirty="0">
                 <a:solidFill>
                   <a:srgbClr val="2F2740"/>
                 </a:solidFill>
@@ -14906,9 +14906,9 @@
                 <a:ea typeface="Calibri" pitchFamily="34" charset="-122"/>
                 <a:cs typeface="Calibri" pitchFamily="34" charset="-120"/>
               </a:rPr>
-              <a:t>the rate is our biggest acquisition asset and our biggest cost line at the same time. That is exactly why I would not cut the headline — I would change what it is quoted against, and what it is attached to.</a:t>
-            </a:r>
-            <a:endParaRPr lang="en-US" sz="1300" dirty="0"/>
+              <a:t>Cuenta Nu launched publicly in May 2023 at 9%, when Banxico’s policy rate was 11.25%. The first wave of savers arrived at a yield below the risk-free rate — for liquidity, no minimums, no fees and the app. The rate arms race came afterwards, which is why I would change what the rate is quoted against and attached to rather than cut it.</a:t>
+            </a:r>
+            <a:endParaRPr lang="en-US" sz="1250" dirty="0"/>
           </a:p>
         </p:txBody>
       </p:sp>
